--- a/doc/pipecat-voicebot-voiceapi-architecture.pptx
+++ b/doc/pipecat-voicebot-voiceapi-architecture.pptx
@@ -8,13 +8,16 @@
     <p:sldId id="256" r:id="rId7"/>
     <p:sldId id="257" r:id="rId8"/>
     <p:sldId id="258" r:id="rId9"/>
+    <p:sldId id="276" r:id="rId27"/>
     <p:sldId id="259" r:id="rId10"/>
     <p:sldId id="260" r:id="rId11"/>
     <p:sldId id="261" r:id="rId12"/>
+    <p:sldId id="277" r:id="rId28"/>
     <p:sldId id="262" r:id="rId13"/>
     <p:sldId id="263" r:id="rId14"/>
     <p:sldId id="264" r:id="rId15"/>
     <p:sldId id="265" r:id="rId16"/>
+    <p:sldId id="278" r:id="rId29"/>
     <p:sldId id="266" r:id="rId17"/>
     <p:sldId id="267" r:id="rId18"/>
     <p:sldId id="268" r:id="rId19"/>
@@ -3241,7 +3244,7 @@
               </a:defRPr>
             </a:pPr>
             <a:r>
-              <a:t>Data Flow: Phone (PSTN)</a:t>
+              <a:t>static/index.html: Browser UI</a:t>
             </a:r>
           </a:p>
         </p:txBody>
@@ -3282,130 +3285,145 @@
               </a:defRPr>
             </a:pPr>
             <a:r>
-              <a:t>1. User calls Vonage phone number</a:t>
-            </a:r>
-          </a:p>
-          <a:p>
-            <a:pPr>
-              <a:spcBef>
-                <a:spcPts val="600"/>
-              </a:spcBef>
-              <a:spcAft>
-                <a:spcPts val="600"/>
-              </a:spcAft>
-              <a:defRPr sz="1800">
-                <a:solidFill>
-                  <a:srgbClr val="323232"/>
-                </a:solidFill>
-              </a:defRPr>
-            </a:pPr>
-            <a:r>
-              <a:t>2. Vonage sends GET /voice/webhook request</a:t>
-            </a:r>
-          </a:p>
-          <a:p>
-            <a:pPr>
-              <a:spcBef>
-                <a:spcPts val="600"/>
-              </a:spcBef>
-              <a:spcAft>
-                <a:spcPts val="600"/>
-              </a:spcAft>
-              <a:defRPr sz="1800">
-                <a:solidFill>
-                  <a:srgbClr val="323232"/>
-                </a:solidFill>
-              </a:defRPr>
-            </a:pPr>
-            <a:r>
-              <a:t>3. Server returns NCCO (specify WebSocket endpoint)</a:t>
-            </a:r>
-          </a:p>
-          <a:p>
-            <a:pPr>
-              <a:spcBef>
-                <a:spcPts val="600"/>
-              </a:spcBef>
-              <a:spcAft>
-                <a:spcPts val="600"/>
-              </a:spcAft>
-              <a:defRPr sz="1800">
-                <a:solidFill>
-                  <a:srgbClr val="323232"/>
-                </a:solidFill>
-              </a:defRPr>
-            </a:pPr>
-            <a:r>
-              <a:t>4. Vonage automatically connects call to WebSocket /ws</a:t>
-            </a:r>
-          </a:p>
-          <a:p>
-            <a:pPr>
-              <a:spcBef>
-                <a:spcPts val="600"/>
-              </a:spcBef>
-              <a:spcAft>
-                <a:spcPts val="600"/>
-              </a:spcAft>
-              <a:defRPr sz="1800">
-                <a:solidFill>
-                  <a:srgbClr val="323232"/>
-                </a:solidFill>
-              </a:defRPr>
-            </a:pPr>
-            <a:r>
-              <a:t>5. Bot starts Pipecat Pipeline</a:t>
-            </a:r>
-          </a:p>
-          <a:p>
-            <a:pPr>
-              <a:spcBef>
-                <a:spcPts val="600"/>
-              </a:spcBef>
-              <a:spcAft>
-                <a:spcPts val="600"/>
-              </a:spcAft>
-              <a:defRPr sz="1800">
-                <a:solidFill>
-                  <a:srgbClr val="323232"/>
-                </a:solidFill>
-              </a:defRPr>
-            </a:pPr>
-            <a:r>
-              <a:t>6. Bidirectional: Phone audio ↔ Vonage ↔ Pipecat ↔ Response audio</a:t>
-            </a:r>
-          </a:p>
-          <a:p>
-            <a:pPr>
-              <a:spcBef>
-                <a:spcPts val="600"/>
-              </a:spcBef>
-              <a:spcAft>
-                <a:spcPts val="600"/>
-              </a:spcAft>
-              <a:defRPr sz="1800">
-                <a:solidFill>
-                  <a:srgbClr val="323232"/>
-                </a:solidFill>
-              </a:defRPr>
-            </a:pPr>
-          </a:p>
-          <a:p>
-            <a:pPr>
-              <a:spcBef>
-                <a:spcPts val="600"/>
-              </a:spcBef>
-              <a:spcAft>
-                <a:spcPts val="600"/>
-              </a:spcAft>
-              <a:defRPr sz="1800">
-                <a:solidFill>
-                  <a:srgbClr val="323232"/>
-                </a:solidFill>
-              </a:defRPr>
-            </a:pPr>
-            <a:r>
-              <a:t>Advantage: No browser needed, works with regular phone</a:t>
+              <a:t>Technology: Vonage OpenTok SDK (vanilla JavaScript)</a:t>
+            </a:r>
+          </a:p>
+          <a:p>
+            <a:pPr>
+              <a:spcBef>
+                <a:spcPts val="600"/>
+              </a:spcBef>
+              <a:spcAft>
+                <a:spcPts val="600"/>
+              </a:spcAft>
+              <a:defRPr sz="1800">
+                <a:solidFill>
+                  <a:srgbClr val="323232"/>
+                </a:solidFill>
+              </a:defRPr>
+            </a:pPr>
+          </a:p>
+          <a:p>
+            <a:pPr>
+              <a:spcBef>
+                <a:spcPts val="600"/>
+              </a:spcBef>
+              <a:spcAft>
+                <a:spcPts val="600"/>
+              </a:spcAft>
+              <a:defRPr sz="1800">
+                <a:solidFill>
+                  <a:srgbClr val="323232"/>
+                </a:solidFill>
+              </a:defRPr>
+            </a:pPr>
+            <a:r>
+              <a:t>Features:</a:t>
+            </a:r>
+          </a:p>
+          <a:p>
+            <a:pPr lvl="1">
+              <a:spcBef>
+                <a:spcPts val="600"/>
+              </a:spcBef>
+              <a:spcAft>
+                <a:spcPts val="600"/>
+              </a:spcAft>
+              <a:defRPr sz="1600">
+                <a:solidFill>
+                  <a:srgbClr val="323232"/>
+                </a:solidFill>
+              </a:defRPr>
+            </a:pPr>
+            <a:r>
+              <a:t>Connect Button: POST /demo/connect → Create Vonage session</a:t>
+            </a:r>
+          </a:p>
+          <a:p>
+            <a:pPr lvl="1">
+              <a:spcBef>
+                <a:spcPts val="600"/>
+              </a:spcBef>
+              <a:spcAft>
+                <a:spcPts val="600"/>
+              </a:spcAft>
+              <a:defRPr sz="1600">
+                <a:solidFill>
+                  <a:srgbClr val="323232"/>
+                </a:solidFill>
+              </a:defRPr>
+            </a:pPr>
+            <a:r>
+              <a:t>Status Display: Update connection state in real-time</a:t>
+            </a:r>
+          </a:p>
+          <a:p>
+            <a:pPr lvl="1">
+              <a:spcBef>
+                <a:spcPts val="600"/>
+              </a:spcBef>
+              <a:spcAft>
+                <a:spcPts val="600"/>
+              </a:spcAft>
+              <a:defRPr sz="1600">
+                <a:solidFill>
+                  <a:srgbClr val="323232"/>
+                </a:solidFill>
+              </a:defRPr>
+            </a:pPr>
+            <a:r>
+              <a:t>Log Panel: Record events/errors with timestamp</a:t>
+            </a:r>
+          </a:p>
+          <a:p>
+            <a:pPr lvl="1">
+              <a:spcBef>
+                <a:spcPts val="600"/>
+              </a:spcBef>
+              <a:spcAft>
+                <a:spcPts val="600"/>
+              </a:spcAft>
+              <a:defRPr sz="1600">
+                <a:solidFill>
+                  <a:srgbClr val="323232"/>
+                </a:solidFill>
+              </a:defRPr>
+            </a:pPr>
+            <a:r>
+              <a:t>Audio Stream: Subscribe to bot's microphone (audioOnly=true)</a:t>
+            </a:r>
+          </a:p>
+          <a:p>
+            <a:pPr>
+              <a:spcBef>
+                <a:spcPts val="600"/>
+              </a:spcBef>
+              <a:spcAft>
+                <a:spcPts val="600"/>
+              </a:spcAft>
+              <a:defRPr sz="1800">
+                <a:solidFill>
+                  <a:srgbClr val="323232"/>
+                </a:solidFill>
+              </a:defRPr>
+            </a:pPr>
+          </a:p>
+          <a:p>
+            <a:pPr>
+              <a:spcBef>
+                <a:spcPts val="600"/>
+              </a:spcBef>
+              <a:spcAft>
+                <a:spcPts val="600"/>
+              </a:spcAft>
+              <a:defRPr sz="1800">
+                <a:solidFill>
+                  <a:srgbClr val="323232"/>
+                </a:solidFill>
+              </a:defRPr>
+            </a:pPr>
+            <a:r>
+              <a:t>Session Flow: OT.initSession() → Connect with token → Subscribe()</a:t>
             </a:r>
           </a:p>
         </p:txBody>
@@ -3466,7 +3484,7 @@
               </a:defRPr>
             </a:pPr>
             <a:r>
-              <a:t>Dependencies &amp; Local Models</a:t>
+              <a:t>Data Flow: Video Session</a:t>
             </a:r>
           </a:p>
         </p:txBody>
@@ -3507,166 +3525,115 @@
               </a:defRPr>
             </a:pPr>
             <a:r>
-              <a:t>Python Packages:</a:t>
-            </a:r>
-          </a:p>
-          <a:p>
-            <a:pPr lvl="1">
-              <a:spcBef>
-                <a:spcPts val="600"/>
-              </a:spcBef>
-              <a:spcAft>
-                <a:spcPts val="600"/>
-              </a:spcAft>
-              <a:defRPr sz="1600">
-                <a:solidFill>
-                  <a:srgbClr val="323232"/>
-                </a:solidFill>
-              </a:defRPr>
-            </a:pPr>
-            <a:r>
-              <a:t>pipecat-ai: Pipeline, STT/TTS/LLM integration</a:t>
-            </a:r>
-          </a:p>
-          <a:p>
-            <a:pPr lvl="1">
-              <a:spcBef>
-                <a:spcPts val="600"/>
-              </a:spcBef>
-              <a:spcAft>
-                <a:spcPts val="600"/>
-              </a:spcAft>
-              <a:defRPr sz="1600">
-                <a:solidFill>
-                  <a:srgbClr val="323232"/>
-                </a:solidFill>
-              </a:defRPr>
-            </a:pPr>
-            <a:r>
-              <a:t>vonage: Vonage Video/Voice API</a:t>
-            </a:r>
-          </a:p>
-          <a:p>
-            <a:pPr lvl="1">
-              <a:spcBef>
-                <a:spcPts val="600"/>
-              </a:spcBef>
-              <a:spcAft>
-                <a:spcPts val="600"/>
-              </a:spcAft>
-              <a:defRPr sz="1600">
-                <a:solidFill>
-                  <a:srgbClr val="323232"/>
-                </a:solidFill>
-              </a:defRPr>
-            </a:pPr>
-            <a:r>
-              <a:t>uvicorn: ASGI server</a:t>
-            </a:r>
-          </a:p>
-          <a:p>
-            <a:pPr lvl="1">
-              <a:spcBef>
-                <a:spcPts val="600"/>
-              </a:spcBef>
-              <a:spcAft>
-                <a:spcPts val="600"/>
-              </a:spcAft>
-              <a:defRPr sz="1600">
-                <a:solidFill>
-                  <a:srgbClr val="323232"/>
-                </a:solidFill>
-              </a:defRPr>
-            </a:pPr>
-            <a:r>
-              <a:t>fastapi: Web framework</a:t>
-            </a:r>
-          </a:p>
-          <a:p>
-            <a:pPr>
-              <a:spcBef>
-                <a:spcPts val="600"/>
-              </a:spcBef>
-              <a:spcAft>
-                <a:spcPts val="600"/>
-              </a:spcAft>
-              <a:defRPr sz="1800">
-                <a:solidFill>
-                  <a:srgbClr val="323232"/>
-                </a:solidFill>
-              </a:defRPr>
-            </a:pPr>
-          </a:p>
-          <a:p>
-            <a:pPr>
-              <a:spcBef>
-                <a:spcPts val="600"/>
-              </a:spcBef>
-              <a:spcAft>
-                <a:spcPts val="600"/>
-              </a:spcAft>
-              <a:defRPr sz="1800">
-                <a:solidFill>
-                  <a:srgbClr val="323232"/>
-                </a:solidFill>
-              </a:defRPr>
-            </a:pPr>
-            <a:r>
-              <a:t>Local Models (LM Studio required):</a:t>
-            </a:r>
-          </a:p>
-          <a:p>
-            <a:pPr lvl="1">
-              <a:spcBef>
-                <a:spcPts val="600"/>
-              </a:spcBef>
-              <a:spcAft>
-                <a:spcPts val="600"/>
-              </a:spcAft>
-              <a:defRPr sz="1600">
-                <a:solidFill>
-                  <a:srgbClr val="323232"/>
-                </a:solidFill>
-              </a:defRPr>
-            </a:pPr>
-            <a:r>
-              <a:t>LLM: Gemma/Llama etc (user-selectable)</a:t>
-            </a:r>
-          </a:p>
-          <a:p>
-            <a:pPr lvl="1">
-              <a:spcBef>
-                <a:spcPts val="600"/>
-              </a:spcBef>
-              <a:spcAft>
-                <a:spcPts val="600"/>
-              </a:spcAft>
-              <a:defRPr sz="1600">
-                <a:solidFill>
-                  <a:srgbClr val="323232"/>
-                </a:solidFill>
-              </a:defRPr>
-            </a:pPr>
-            <a:r>
-              <a:t>STT: Whisper (LARGE_V3_TURBO_Q4 recommended)</a:t>
-            </a:r>
-          </a:p>
-          <a:p>
-            <a:pPr lvl="1">
-              <a:spcBef>
-                <a:spcPts val="600"/>
-              </a:spcBef>
-              <a:spcAft>
-                <a:spcPts val="600"/>
-              </a:spcAft>
-              <a:defRPr sz="1600">
-                <a:solidFill>
-                  <a:srgbClr val="323232"/>
-                </a:solidFill>
-              </a:defRPr>
-            </a:pPr>
-            <a:r>
-              <a:t>TTS: pyopenjtalk (HTS-based)</a:t>
+              <a:t>1. User clicks 'Connect' button</a:t>
+            </a:r>
+          </a:p>
+          <a:p>
+            <a:pPr>
+              <a:spcBef>
+                <a:spcPts val="600"/>
+              </a:spcBef>
+              <a:spcAft>
+                <a:spcPts val="600"/>
+              </a:spcAft>
+              <a:defRPr sz="1800">
+                <a:solidFill>
+                  <a:srgbClr val="323232"/>
+                </a:solidFill>
+              </a:defRPr>
+            </a:pPr>
+            <a:r>
+              <a:t>2. Browser calls POST /demo/connect</a:t>
+            </a:r>
+          </a:p>
+          <a:p>
+            <a:pPr>
+              <a:spcBef>
+                <a:spcPts val="600"/>
+              </a:spcBef>
+              <a:spcAft>
+                <a:spcPts val="600"/>
+              </a:spcAft>
+              <a:defRPr sz="1800">
+                <a:solidFill>
+                  <a:srgbClr val="323232"/>
+                </a:solidFill>
+              </a:defRPr>
+            </a:pPr>
+            <a:r>
+              <a:t>3. Server creates Vonage Session → Launches Audio Connector</a:t>
+            </a:r>
+          </a:p>
+          <a:p>
+            <a:pPr>
+              <a:spcBef>
+                <a:spcPts val="600"/>
+              </a:spcBef>
+              <a:spcAft>
+                <a:spcPts val="600"/>
+              </a:spcAft>
+              <a:defRPr sz="1800">
+                <a:solidFill>
+                  <a:srgbClr val="323232"/>
+                </a:solidFill>
+              </a:defRPr>
+            </a:pPr>
+            <a:r>
+              <a:t>4. Browser calls OT.initSession() → Join with token</a:t>
+            </a:r>
+          </a:p>
+          <a:p>
+            <a:pPr>
+              <a:spcBef>
+                <a:spcPts val="600"/>
+              </a:spcBef>
+              <a:spcAft>
+                <a:spcPts val="600"/>
+              </a:spcAft>
+              <a:defRPr sz="1800">
+                <a:solidFill>
+                  <a:srgbClr val="323232"/>
+                </a:solidFill>
+              </a:defRPr>
+            </a:pPr>
+            <a:r>
+              <a:t>5. Vonage Audio Connector connects to WebSocket</a:t>
+            </a:r>
+          </a:p>
+          <a:p>
+            <a:pPr>
+              <a:spcBef>
+                <a:spcPts val="600"/>
+              </a:spcBef>
+              <a:spcAft>
+                <a:spcPts val="600"/>
+              </a:spcAft>
+              <a:defRPr sz="1800">
+                <a:solidFill>
+                  <a:srgbClr val="323232"/>
+                </a:solidFill>
+              </a:defRPr>
+            </a:pPr>
+            <a:r>
+              <a:t>6. Bot sends greeting (Text → TTS → Audio)</a:t>
+            </a:r>
+          </a:p>
+          <a:p>
+            <a:pPr>
+              <a:spcBef>
+                <a:spcPts val="600"/>
+              </a:spcBef>
+              <a:spcAft>
+                <a:spcPts val="600"/>
+              </a:spcAft>
+              <a:defRPr sz="1800">
+                <a:solidFill>
+                  <a:srgbClr val="323232"/>
+                </a:solidFill>
+              </a:defRPr>
+            </a:pPr>
+            <a:r>
+              <a:t>7. Bidirectional: User speech ↔ Vonage ↔ Pipecat ↔ Response audio</a:t>
             </a:r>
           </a:p>
         </p:txBody>
@@ -3727,7 +3694,7 @@
               </a:defRPr>
             </a:pPr>
             <a:r>
-              <a:t>Environment Variables (.env)</a:t>
+              <a:t>Data Flow: Phone (PSTN)</a:t>
             </a:r>
           </a:p>
         </p:txBody>
@@ -3768,166 +3735,130 @@
               </a:defRPr>
             </a:pPr>
             <a:r>
-              <a:t>LM Studio:</a:t>
-            </a:r>
-          </a:p>
-          <a:p>
-            <a:pPr lvl="1">
-              <a:spcBef>
-                <a:spcPts val="600"/>
-              </a:spcBef>
-              <a:spcAft>
-                <a:spcPts val="600"/>
-              </a:spcAft>
-              <a:defRPr sz="1600">
-                <a:solidFill>
-                  <a:srgbClr val="323232"/>
-                </a:solidFill>
-              </a:defRPr>
-            </a:pPr>
-            <a:r>
-              <a:t>LM_STUDIO_BASE_URL=http://localhost:1234/v1</a:t>
-            </a:r>
-          </a:p>
-          <a:p>
-            <a:pPr lvl="1">
-              <a:spcBef>
-                <a:spcPts val="600"/>
-              </a:spcBef>
-              <a:spcAft>
-                <a:spcPts val="600"/>
-              </a:spcAft>
-              <a:defRPr sz="1600">
-                <a:solidFill>
-                  <a:srgbClr val="323232"/>
-                </a:solidFill>
-              </a:defRPr>
-            </a:pPr>
-            <a:r>
-              <a:t>LM_MODEL=gemma-4-26B-A4B-it-MLX-8bit</a:t>
-            </a:r>
-          </a:p>
-          <a:p>
-            <a:pPr lvl="1">
-              <a:spcBef>
-                <a:spcPts val="600"/>
-              </a:spcBef>
-              <a:spcAft>
-                <a:spcPts val="600"/>
-              </a:spcAft>
-              <a:defRPr sz="1600">
-                <a:solidFill>
-                  <a:srgbClr val="323232"/>
-                </a:solidFill>
-              </a:defRPr>
-            </a:pPr>
-            <a:r>
-              <a:t>STT_LANGUAGE=ja</a:t>
-            </a:r>
-          </a:p>
-          <a:p>
-            <a:pPr>
-              <a:spcBef>
-                <a:spcPts val="600"/>
-              </a:spcBef>
-              <a:spcAft>
-                <a:spcPts val="600"/>
-              </a:spcAft>
-              <a:defRPr sz="1800">
-                <a:solidFill>
-                  <a:srgbClr val="323232"/>
-                </a:solidFill>
-              </a:defRPr>
-            </a:pPr>
-          </a:p>
-          <a:p>
-            <a:pPr>
-              <a:spcBef>
-                <a:spcPts val="600"/>
-              </a:spcBef>
-              <a:spcAft>
-                <a:spcPts val="600"/>
-              </a:spcAft>
-              <a:defRPr sz="1800">
-                <a:solidFill>
-                  <a:srgbClr val="323232"/>
-                </a:solidFill>
-              </a:defRPr>
-            </a:pPr>
-            <a:r>
-              <a:t>Vonage:</a:t>
-            </a:r>
-          </a:p>
-          <a:p>
-            <a:pPr lvl="1">
-              <a:spcBef>
-                <a:spcPts val="600"/>
-              </a:spcBef>
-              <a:spcAft>
-                <a:spcPts val="600"/>
-              </a:spcAft>
-              <a:defRPr sz="1600">
-                <a:solidFill>
-                  <a:srgbClr val="323232"/>
-                </a:solidFill>
-              </a:defRPr>
-            </a:pPr>
-            <a:r>
-              <a:t>VONAGE_APPLICATION_ID=&lt;your-app-id&gt;</a:t>
-            </a:r>
-          </a:p>
-          <a:p>
-            <a:pPr lvl="1">
-              <a:spcBef>
-                <a:spcPts val="600"/>
-              </a:spcBef>
-              <a:spcAft>
-                <a:spcPts val="600"/>
-              </a:spcAft>
-              <a:defRPr sz="1600">
-                <a:solidFill>
-                  <a:srgbClr val="323232"/>
-                </a:solidFill>
-              </a:defRPr>
-            </a:pPr>
-            <a:r>
-              <a:t>VONAGE_PRIVATE_KEY=&lt;path-or-raw-key&gt;</a:t>
-            </a:r>
-          </a:p>
-          <a:p>
-            <a:pPr lvl="1">
-              <a:spcBef>
-                <a:spcPts val="600"/>
-              </a:spcBef>
-              <a:spcAft>
-                <a:spcPts val="600"/>
-              </a:spcAft>
-              <a:defRPr sz="1600">
-                <a:solidFill>
-                  <a:srgbClr val="323232"/>
-                </a:solidFill>
-              </a:defRPr>
-            </a:pPr>
-            <a:r>
-              <a:t>VONAGE_AUDIO_RATE=16000</a:t>
-            </a:r>
-          </a:p>
-          <a:p>
-            <a:pPr lvl="1">
-              <a:spcBef>
-                <a:spcPts val="600"/>
-              </a:spcBef>
-              <a:spcAft>
-                <a:spcPts val="600"/>
-              </a:spcAft>
-              <a:defRPr sz="1600">
-                <a:solidFill>
-                  <a:srgbClr val="323232"/>
-                </a:solidFill>
-              </a:defRPr>
-            </a:pPr>
-            <a:r>
-              <a:t>WS_URI=wss://&lt;tunnel-url&gt;/ws (optional)</a:t>
+              <a:t>1. User calls Vonage phone number</a:t>
+            </a:r>
+          </a:p>
+          <a:p>
+            <a:pPr>
+              <a:spcBef>
+                <a:spcPts val="600"/>
+              </a:spcBef>
+              <a:spcAft>
+                <a:spcPts val="600"/>
+              </a:spcAft>
+              <a:defRPr sz="1800">
+                <a:solidFill>
+                  <a:srgbClr val="323232"/>
+                </a:solidFill>
+              </a:defRPr>
+            </a:pPr>
+            <a:r>
+              <a:t>2. Vonage sends GET /voice/webhook request</a:t>
+            </a:r>
+          </a:p>
+          <a:p>
+            <a:pPr>
+              <a:spcBef>
+                <a:spcPts val="600"/>
+              </a:spcBef>
+              <a:spcAft>
+                <a:spcPts val="600"/>
+              </a:spcAft>
+              <a:defRPr sz="1800">
+                <a:solidFill>
+                  <a:srgbClr val="323232"/>
+                </a:solidFill>
+              </a:defRPr>
+            </a:pPr>
+            <a:r>
+              <a:t>3. Server returns NCCO (specify WebSocket endpoint)</a:t>
+            </a:r>
+          </a:p>
+          <a:p>
+            <a:pPr>
+              <a:spcBef>
+                <a:spcPts val="600"/>
+              </a:spcBef>
+              <a:spcAft>
+                <a:spcPts val="600"/>
+              </a:spcAft>
+              <a:defRPr sz="1800">
+                <a:solidFill>
+                  <a:srgbClr val="323232"/>
+                </a:solidFill>
+              </a:defRPr>
+            </a:pPr>
+            <a:r>
+              <a:t>4. Vonage automatically connects call to WebSocket /ws</a:t>
+            </a:r>
+          </a:p>
+          <a:p>
+            <a:pPr>
+              <a:spcBef>
+                <a:spcPts val="600"/>
+              </a:spcBef>
+              <a:spcAft>
+                <a:spcPts val="600"/>
+              </a:spcAft>
+              <a:defRPr sz="1800">
+                <a:solidFill>
+                  <a:srgbClr val="323232"/>
+                </a:solidFill>
+              </a:defRPr>
+            </a:pPr>
+            <a:r>
+              <a:t>5. Bot starts Pipecat Pipeline</a:t>
+            </a:r>
+          </a:p>
+          <a:p>
+            <a:pPr>
+              <a:spcBef>
+                <a:spcPts val="600"/>
+              </a:spcBef>
+              <a:spcAft>
+                <a:spcPts val="600"/>
+              </a:spcAft>
+              <a:defRPr sz="1800">
+                <a:solidFill>
+                  <a:srgbClr val="323232"/>
+                </a:solidFill>
+              </a:defRPr>
+            </a:pPr>
+            <a:r>
+              <a:t>6. Bidirectional: Phone audio ↔ Vonage ↔ Pipecat ↔ Response audio</a:t>
+            </a:r>
+          </a:p>
+          <a:p>
+            <a:pPr>
+              <a:spcBef>
+                <a:spcPts val="600"/>
+              </a:spcBef>
+              <a:spcAft>
+                <a:spcPts val="600"/>
+              </a:spcAft>
+              <a:defRPr sz="1800">
+                <a:solidFill>
+                  <a:srgbClr val="323232"/>
+                </a:solidFill>
+              </a:defRPr>
+            </a:pPr>
+          </a:p>
+          <a:p>
+            <a:pPr>
+              <a:spcBef>
+                <a:spcPts val="600"/>
+              </a:spcBef>
+              <a:spcAft>
+                <a:spcPts val="600"/>
+              </a:spcAft>
+              <a:defRPr sz="1800">
+                <a:solidFill>
+                  <a:srgbClr val="323232"/>
+                </a:solidFill>
+              </a:defRPr>
+            </a:pPr>
+            <a:r>
+              <a:t>Advantage: No browser needed, works with regular phone</a:t>
             </a:r>
           </a:p>
         </p:txBody>
@@ -3946,7 +3877,7 @@
     <p:bg>
       <p:bgPr>
         <a:solidFill>
-          <a:srgbClr val="F5F5F5"/>
+          <a:srgbClr val="FFFFFF"/>
         </a:solidFill>
         <a:effectLst/>
       </p:bgPr>
@@ -3966,8 +3897,8 @@
         </p:nvSpPr>
         <p:spPr>
           <a:xfrm>
-            <a:off x="457200" y="365760"/>
-            <a:ext cx="8229600" cy="731520"/>
+            <a:off x="365760" y="228600"/>
+            <a:ext cx="8412480" cy="640080"/>
           </a:xfrm>
           <a:prstGeom prst="rect">
             <a:avLst/>
@@ -3975,269 +3906,48 @@
           <a:noFill/>
         </p:spPr>
         <p:txBody>
-          <a:bodyPr wrap="none">
+          <a:bodyPr wrap="square">
             <a:spAutoFit/>
           </a:bodyPr>
           <a:lstStyle/>
           <a:p>
-            <a:pPr>
-              <a:defRPr sz="4000" b="1">
+            <a:pPr algn="ctr">
+              <a:defRPr sz="2800" b="1">
                 <a:solidFill>
                   <a:srgbClr val="1976D2"/>
                 </a:solidFill>
               </a:defRPr>
             </a:pPr>
             <a:r>
-              <a:t>Startup Steps</a:t>
-            </a:r>
-          </a:p>
-        </p:txBody>
-      </p:sp>
-      <p:sp>
-        <p:nvSpPr>
-          <p:cNvPr id="3" name="TextBox 2"/>
-          <p:cNvSpPr txBox="1"/>
+              <a:t>Diagram: Data Flow</a:t>
+            </a:r>
+          </a:p>
+        </p:txBody>
+      </p:sp>
+      <p:pic>
+        <p:nvPicPr>
+          <p:cNvPr id="3" name="Picture 2" descr="data_flow_en.png"/>
+          <p:cNvPicPr>
+            <a:picLocks noChangeAspect="1"/>
+          </p:cNvPicPr>
           <p:nvPr/>
-        </p:nvSpPr>
+        </p:nvPicPr>
+        <p:blipFill>
+          <a:blip r:embed="rId3"/>
+          <a:stretch>
+            <a:fillRect/>
+          </a:stretch>
+        </p:blipFill>
         <p:spPr>
           <a:xfrm>
-            <a:off x="640080" y="1280160"/>
-            <a:ext cx="7863840" cy="5029200"/>
+            <a:off x="3767559" y="1051560"/>
+            <a:ext cx="1608881" cy="5486400"/>
           </a:xfrm>
           <a:prstGeom prst="rect">
             <a:avLst/>
           </a:prstGeom>
-          <a:noFill/>
         </p:spPr>
-        <p:txBody>
-          <a:bodyPr wrap="square">
-            <a:spAutoFit/>
-          </a:bodyPr>
-          <a:lstStyle/>
-          <a:p>
-            <a:pPr>
-              <a:spcBef>
-                <a:spcPts val="600"/>
-              </a:spcBef>
-              <a:spcAft>
-                <a:spcPts val="600"/>
-              </a:spcAft>
-              <a:defRPr sz="1800">
-                <a:solidFill>
-                  <a:srgbClr val="323232"/>
-                </a:solidFill>
-              </a:defRPr>
-            </a:pPr>
-            <a:r>
-              <a:t>1. Start LM Studio on localhost:1234</a:t>
-            </a:r>
-          </a:p>
-          <a:p>
-            <a:pPr lvl="1">
-              <a:spcBef>
-                <a:spcPts val="600"/>
-              </a:spcBef>
-              <a:spcAft>
-                <a:spcPts val="600"/>
-              </a:spcAft>
-              <a:defRPr sz="1600">
-                <a:solidFill>
-                  <a:srgbClr val="323232"/>
-                </a:solidFill>
-              </a:defRPr>
-            </a:pPr>
-            <a:r>
-              <a:t>Load a model (Gemma/Llama etc)</a:t>
-            </a:r>
-          </a:p>
-          <a:p>
-            <a:pPr>
-              <a:spcBef>
-                <a:spcPts val="600"/>
-              </a:spcBef>
-              <a:spcAft>
-                <a:spcPts val="600"/>
-              </a:spcAft>
-              <a:defRPr sz="1800">
-                <a:solidFill>
-                  <a:srgbClr val="323232"/>
-                </a:solidFill>
-              </a:defRPr>
-            </a:pPr>
-          </a:p>
-          <a:p>
-            <a:pPr>
-              <a:spcBef>
-                <a:spcPts val="600"/>
-              </a:spcBef>
-              <a:spcAft>
-                <a:spcPts val="600"/>
-              </a:spcAft>
-              <a:defRPr sz="1800">
-                <a:solidFill>
-                  <a:srgbClr val="323232"/>
-                </a:solidFill>
-              </a:defRPr>
-            </a:pPr>
-            <a:r>
-              <a:t>2. Configure repository with .env file</a:t>
-            </a:r>
-          </a:p>
-          <a:p>
-            <a:pPr>
-              <a:spcBef>
-                <a:spcPts val="600"/>
-              </a:spcBef>
-              <a:spcAft>
-                <a:spcPts val="600"/>
-              </a:spcAft>
-              <a:defRPr sz="1800">
-                <a:solidFill>
-                  <a:srgbClr val="323232"/>
-                </a:solidFill>
-              </a:defRPr>
-            </a:pPr>
-          </a:p>
-          <a:p>
-            <a:pPr>
-              <a:spcBef>
-                <a:spcPts val="600"/>
-              </a:spcBef>
-              <a:spcAft>
-                <a:spcPts val="600"/>
-              </a:spcAft>
-              <a:defRPr sz="1800">
-                <a:solidFill>
-                  <a:srgbClr val="323232"/>
-                </a:solidFill>
-              </a:defRPr>
-            </a:pPr>
-            <a:r>
-              <a:t>3. Expose with Cloudflare Tunnel</a:t>
-            </a:r>
-          </a:p>
-          <a:p>
-            <a:pPr lvl="1">
-              <a:spcBef>
-                <a:spcPts val="600"/>
-              </a:spcBef>
-              <a:spcAft>
-                <a:spcPts val="600"/>
-              </a:spcAft>
-              <a:defRPr sz="1600">
-                <a:solidFill>
-                  <a:srgbClr val="323232"/>
-                </a:solidFill>
-              </a:defRPr>
-            </a:pPr>
-            <a:r>
-              <a:t>cloudflared tunnel run pipecat</a:t>
-            </a:r>
-          </a:p>
-          <a:p>
-            <a:pPr>
-              <a:spcBef>
-                <a:spcPts val="600"/>
-              </a:spcBef>
-              <a:spcAft>
-                <a:spcPts val="600"/>
-              </a:spcAft>
-              <a:defRPr sz="1800">
-                <a:solidFill>
-                  <a:srgbClr val="323232"/>
-                </a:solidFill>
-              </a:defRPr>
-            </a:pPr>
-          </a:p>
-          <a:p>
-            <a:pPr>
-              <a:spcBef>
-                <a:spcPts val="600"/>
-              </a:spcBef>
-              <a:spcAft>
-                <a:spcPts val="600"/>
-              </a:spcAft>
-              <a:defRPr sz="1800">
-                <a:solidFill>
-                  <a:srgbClr val="323232"/>
-                </a:solidFill>
-              </a:defRPr>
-            </a:pPr>
-            <a:r>
-              <a:t>4. Start FastAPI server</a:t>
-            </a:r>
-          </a:p>
-          <a:p>
-            <a:pPr lvl="1">
-              <a:spcBef>
-                <a:spcPts val="600"/>
-              </a:spcBef>
-              <a:spcAft>
-                <a:spcPts val="600"/>
-              </a:spcAft>
-              <a:defRPr sz="1600">
-                <a:solidFill>
-                  <a:srgbClr val="323232"/>
-                </a:solidFill>
-              </a:defRPr>
-            </a:pPr>
-            <a:r>
-              <a:t>python server.py</a:t>
-            </a:r>
-          </a:p>
-          <a:p>
-            <a:pPr>
-              <a:spcBef>
-                <a:spcPts val="600"/>
-              </a:spcBef>
-              <a:spcAft>
-                <a:spcPts val="600"/>
-              </a:spcAft>
-              <a:defRPr sz="1800">
-                <a:solidFill>
-                  <a:srgbClr val="323232"/>
-                </a:solidFill>
-              </a:defRPr>
-            </a:pPr>
-          </a:p>
-          <a:p>
-            <a:pPr>
-              <a:spcBef>
-                <a:spcPts val="600"/>
-              </a:spcBef>
-              <a:spcAft>
-                <a:spcPts val="600"/>
-              </a:spcAft>
-              <a:defRPr sz="1800">
-                <a:solidFill>
-                  <a:srgbClr val="323232"/>
-                </a:solidFill>
-              </a:defRPr>
-            </a:pPr>
-            <a:r>
-              <a:t>5. Open Tunnel URL in browser</a:t>
-            </a:r>
-          </a:p>
-          <a:p>
-            <a:pPr>
-              <a:spcBef>
-                <a:spcPts val="600"/>
-              </a:spcBef>
-              <a:spcAft>
-                <a:spcPts val="600"/>
-              </a:spcAft>
-              <a:defRPr sz="1800">
-                <a:solidFill>
-                  <a:srgbClr val="323232"/>
-                </a:solidFill>
-              </a:defRPr>
-            </a:pPr>
-            <a:r>
-              <a:t>6. Click 'Connect' button → Voice conversation starts</a:t>
-            </a:r>
-          </a:p>
-        </p:txBody>
-      </p:sp>
+      </p:pic>
     </p:spTree>
   </p:cSld>
   <p:clrMapOvr>
@@ -4294,7 +4004,7 @@
               </a:defRPr>
             </a:pPr>
             <a:r>
-              <a:t>Pipeline Configuration Details</a:t>
+              <a:t>Dependencies &amp; Local Models</a:t>
             </a:r>
           </a:p>
         </p:txBody>
@@ -4335,199 +4045,166 @@
               </a:defRPr>
             </a:pPr>
             <a:r>
-              <a:t>VAD (Voice Activity Detection):</a:t>
-            </a:r>
-          </a:p>
-          <a:p>
-            <a:pPr lvl="1">
-              <a:spcBef>
-                <a:spcPts val="600"/>
-              </a:spcBef>
-              <a:spcAft>
-                <a:spcPts val="600"/>
-              </a:spcAft>
-              <a:defRPr sz="1600">
-                <a:solidFill>
-                  <a:srgbClr val="323232"/>
-                </a:solidFill>
-              </a:defRPr>
-            </a:pPr>
-            <a:r>
-              <a:t>Confidence: 0.5</a:t>
-            </a:r>
-          </a:p>
-          <a:p>
-            <a:pPr lvl="1">
-              <a:spcBef>
-                <a:spcPts val="600"/>
-              </a:spcBef>
-              <a:spcAft>
-                <a:spcPts val="600"/>
-              </a:spcAft>
-              <a:defRPr sz="1600">
-                <a:solidFill>
-                  <a:srgbClr val="323232"/>
-                </a:solidFill>
-              </a:defRPr>
-            </a:pPr>
-            <a:r>
-              <a:t>Speech Start: 0.2 sec</a:t>
-            </a:r>
-          </a:p>
-          <a:p>
-            <a:pPr lvl="1">
-              <a:spcBef>
-                <a:spcPts val="600"/>
-              </a:spcBef>
-              <a:spcAft>
-                <a:spcPts val="600"/>
-              </a:spcAft>
-              <a:defRPr sz="1600">
-                <a:solidFill>
-                  <a:srgbClr val="323232"/>
-                </a:solidFill>
-              </a:defRPr>
-            </a:pPr>
-            <a:r>
-              <a:t>Silence Detection: 0.2 sec</a:t>
-            </a:r>
-          </a:p>
-          <a:p>
-            <a:pPr lvl="1">
-              <a:spcBef>
-                <a:spcPts val="600"/>
-              </a:spcBef>
-              <a:spcAft>
-                <a:spcPts val="600"/>
-              </a:spcAft>
-              <a:defRPr sz="1600">
-                <a:solidFill>
-                  <a:srgbClr val="323232"/>
-                </a:solidFill>
-              </a:defRPr>
-            </a:pPr>
-            <a:r>
-              <a:t>Idle: 1.0 sec</a:t>
-            </a:r>
-          </a:p>
-          <a:p>
-            <a:pPr>
-              <a:spcBef>
-                <a:spcPts val="600"/>
-              </a:spcBef>
-              <a:spcAft>
-                <a:spcPts val="600"/>
-              </a:spcAft>
-              <a:defRPr sz="1800">
-                <a:solidFill>
-                  <a:srgbClr val="323232"/>
-                </a:solidFill>
-              </a:defRPr>
-            </a:pPr>
-          </a:p>
-          <a:p>
-            <a:pPr>
-              <a:spcBef>
-                <a:spcPts val="600"/>
-              </a:spcBef>
-              <a:spcAft>
-                <a:spcPts val="600"/>
-              </a:spcAft>
-              <a:defRPr sz="1800">
-                <a:solidFill>
-                  <a:srgbClr val="323232"/>
-                </a:solidFill>
-              </a:defRPr>
-            </a:pPr>
-            <a:r>
-              <a:t>STT:</a:t>
-            </a:r>
-          </a:p>
-          <a:p>
-            <a:pPr lvl="1">
-              <a:spcBef>
-                <a:spcPts val="600"/>
-              </a:spcBef>
-              <a:spcAft>
-                <a:spcPts val="600"/>
-              </a:spcAft>
-              <a:defRPr sz="1600">
-                <a:solidFill>
-                  <a:srgbClr val="323232"/>
-                </a:solidFill>
-              </a:defRPr>
-            </a:pPr>
-            <a:r>
-              <a:t>Language: Japanese (ja)</a:t>
-            </a:r>
-          </a:p>
-          <a:p>
-            <a:pPr lvl="1">
-              <a:spcBef>
-                <a:spcPts val="600"/>
-              </a:spcBef>
-              <a:spcAft>
-                <a:spcPts val="600"/>
-              </a:spcAft>
-              <a:defRPr sz="1600">
-                <a:solidFill>
-                  <a:srgbClr val="323232"/>
-                </a:solidFill>
-              </a:defRPr>
-            </a:pPr>
-            <a:r>
-              <a:t>no_speech_prob: 0.3 (adjust silence threshold)</a:t>
-            </a:r>
-          </a:p>
-          <a:p>
-            <a:pPr>
-              <a:spcBef>
-                <a:spcPts val="600"/>
-              </a:spcBef>
-              <a:spcAft>
-                <a:spcPts val="600"/>
-              </a:spcAft>
-              <a:defRPr sz="1800">
-                <a:solidFill>
-                  <a:srgbClr val="323232"/>
-                </a:solidFill>
-              </a:defRPr>
-            </a:pPr>
-          </a:p>
-          <a:p>
-            <a:pPr>
-              <a:spcBef>
-                <a:spcPts val="600"/>
-              </a:spcBef>
-              <a:spcAft>
-                <a:spcPts val="600"/>
-              </a:spcAft>
-              <a:defRPr sz="1800">
-                <a:solidFill>
-                  <a:srgbClr val="323232"/>
-                </a:solidFill>
-              </a:defRPr>
-            </a:pPr>
-            <a:r>
-              <a:t>LLM:</a:t>
-            </a:r>
-          </a:p>
-          <a:p>
-            <a:pPr lvl="1">
-              <a:spcBef>
-                <a:spcPts val="600"/>
-              </a:spcBef>
-              <a:spcAft>
-                <a:spcPts val="600"/>
-              </a:spcAft>
-              <a:defRPr sz="1600">
-                <a:solidFill>
-                  <a:srgbClr val="323232"/>
-                </a:solidFill>
-              </a:defRPr>
-            </a:pPr>
-            <a:r>
-              <a:t>System Prompt: Japanese, concise, TTS-compatible</a:t>
+              <a:t>Python Packages:</a:t>
+            </a:r>
+          </a:p>
+          <a:p>
+            <a:pPr lvl="1">
+              <a:spcBef>
+                <a:spcPts val="600"/>
+              </a:spcBef>
+              <a:spcAft>
+                <a:spcPts val="600"/>
+              </a:spcAft>
+              <a:defRPr sz="1600">
+                <a:solidFill>
+                  <a:srgbClr val="323232"/>
+                </a:solidFill>
+              </a:defRPr>
+            </a:pPr>
+            <a:r>
+              <a:t>pipecat-ai: Pipeline, STT/TTS/LLM integration</a:t>
+            </a:r>
+          </a:p>
+          <a:p>
+            <a:pPr lvl="1">
+              <a:spcBef>
+                <a:spcPts val="600"/>
+              </a:spcBef>
+              <a:spcAft>
+                <a:spcPts val="600"/>
+              </a:spcAft>
+              <a:defRPr sz="1600">
+                <a:solidFill>
+                  <a:srgbClr val="323232"/>
+                </a:solidFill>
+              </a:defRPr>
+            </a:pPr>
+            <a:r>
+              <a:t>vonage: Vonage Video/Voice API</a:t>
+            </a:r>
+          </a:p>
+          <a:p>
+            <a:pPr lvl="1">
+              <a:spcBef>
+                <a:spcPts val="600"/>
+              </a:spcBef>
+              <a:spcAft>
+                <a:spcPts val="600"/>
+              </a:spcAft>
+              <a:defRPr sz="1600">
+                <a:solidFill>
+                  <a:srgbClr val="323232"/>
+                </a:solidFill>
+              </a:defRPr>
+            </a:pPr>
+            <a:r>
+              <a:t>uvicorn: ASGI server</a:t>
+            </a:r>
+          </a:p>
+          <a:p>
+            <a:pPr lvl="1">
+              <a:spcBef>
+                <a:spcPts val="600"/>
+              </a:spcBef>
+              <a:spcAft>
+                <a:spcPts val="600"/>
+              </a:spcAft>
+              <a:defRPr sz="1600">
+                <a:solidFill>
+                  <a:srgbClr val="323232"/>
+                </a:solidFill>
+              </a:defRPr>
+            </a:pPr>
+            <a:r>
+              <a:t>fastapi: Web framework</a:t>
+            </a:r>
+          </a:p>
+          <a:p>
+            <a:pPr>
+              <a:spcBef>
+                <a:spcPts val="600"/>
+              </a:spcBef>
+              <a:spcAft>
+                <a:spcPts val="600"/>
+              </a:spcAft>
+              <a:defRPr sz="1800">
+                <a:solidFill>
+                  <a:srgbClr val="323232"/>
+                </a:solidFill>
+              </a:defRPr>
+            </a:pPr>
+          </a:p>
+          <a:p>
+            <a:pPr>
+              <a:spcBef>
+                <a:spcPts val="600"/>
+              </a:spcBef>
+              <a:spcAft>
+                <a:spcPts val="600"/>
+              </a:spcAft>
+              <a:defRPr sz="1800">
+                <a:solidFill>
+                  <a:srgbClr val="323232"/>
+                </a:solidFill>
+              </a:defRPr>
+            </a:pPr>
+            <a:r>
+              <a:t>Local Models (LM Studio required):</a:t>
+            </a:r>
+          </a:p>
+          <a:p>
+            <a:pPr lvl="1">
+              <a:spcBef>
+                <a:spcPts val="600"/>
+              </a:spcBef>
+              <a:spcAft>
+                <a:spcPts val="600"/>
+              </a:spcAft>
+              <a:defRPr sz="1600">
+                <a:solidFill>
+                  <a:srgbClr val="323232"/>
+                </a:solidFill>
+              </a:defRPr>
+            </a:pPr>
+            <a:r>
+              <a:t>LLM: Gemma/Llama etc (user-selectable)</a:t>
+            </a:r>
+          </a:p>
+          <a:p>
+            <a:pPr lvl="1">
+              <a:spcBef>
+                <a:spcPts val="600"/>
+              </a:spcBef>
+              <a:spcAft>
+                <a:spcPts val="600"/>
+              </a:spcAft>
+              <a:defRPr sz="1600">
+                <a:solidFill>
+                  <a:srgbClr val="323232"/>
+                </a:solidFill>
+              </a:defRPr>
+            </a:pPr>
+            <a:r>
+              <a:t>STT: Whisper (LARGE_V3_TURBO_Q4 recommended)</a:t>
+            </a:r>
+          </a:p>
+          <a:p>
+            <a:pPr lvl="1">
+              <a:spcBef>
+                <a:spcPts val="600"/>
+              </a:spcBef>
+              <a:spcAft>
+                <a:spcPts val="600"/>
+              </a:spcAft>
+              <a:defRPr sz="1600">
+                <a:solidFill>
+                  <a:srgbClr val="323232"/>
+                </a:solidFill>
+              </a:defRPr>
+            </a:pPr>
+            <a:r>
+              <a:t>TTS: pyopenjtalk (HTS-based)</a:t>
             </a:r>
           </a:p>
         </p:txBody>
@@ -4588,7 +4265,7 @@
               </a:defRPr>
             </a:pPr>
             <a:r>
-              <a:t>Important Technical Approaches</a:t>
+              <a:t>Environment Variables (.env)</a:t>
             </a:r>
           </a:p>
         </p:txBody>
@@ -4629,181 +4306,166 @@
               </a:defRPr>
             </a:pPr>
             <a:r>
-              <a:t>1. State Reset (_reset_service):</a:t>
-            </a:r>
-          </a:p>
-          <a:p>
-            <a:pPr lvl="1">
-              <a:spcBef>
-                <a:spcPts val="600"/>
-              </a:spcBef>
-              <a:spcAft>
-                <a:spcPts val="600"/>
-              </a:spcAft>
-              <a:defRPr sz="1600">
-                <a:solidFill>
-                  <a:srgbClr val="323232"/>
-                </a:solidFill>
-              </a:defRPr>
-            </a:pPr>
-            <a:r>
-              <a:t>Clear LLM/STT/TTS internal state per connection</a:t>
-            </a:r>
-          </a:p>
-          <a:p>
-            <a:pPr lvl="1">
-              <a:spcBef>
-                <a:spcPts val="600"/>
-              </a:spcBef>
-              <a:spcAft>
-                <a:spcPts val="600"/>
-              </a:spcAft>
-              <a:defRPr sz="1600">
-                <a:solidFill>
-                  <a:srgbClr val="323232"/>
-                </a:solidFill>
-              </a:defRPr>
-            </a:pPr>
-            <a:r>
-              <a:t>Prevent cross-connection interference</a:t>
-            </a:r>
-          </a:p>
-          <a:p>
-            <a:pPr>
-              <a:spcBef>
-                <a:spcPts val="600"/>
-              </a:spcBef>
-              <a:spcAft>
-                <a:spcPts val="600"/>
-              </a:spcAft>
-              <a:defRPr sz="1800">
-                <a:solidFill>
-                  <a:srgbClr val="323232"/>
-                </a:solidFill>
-              </a:defRPr>
-            </a:pPr>
-          </a:p>
-          <a:p>
-            <a:pPr>
-              <a:spcBef>
-                <a:spcPts val="600"/>
-              </a:spcBef>
-              <a:spcAft>
-                <a:spcPts val="600"/>
-              </a:spcAft>
-              <a:defRPr sz="1800">
-                <a:solidFill>
-                  <a:srgbClr val="323232"/>
-                </a:solidFill>
-              </a:defRPr>
-            </a:pPr>
-            <a:r>
-              <a:t>2. Monkey-Patch (LLMAssistantAggregator):</a:t>
-            </a:r>
-          </a:p>
-          <a:p>
-            <a:pPr lvl="1">
-              <a:spcBef>
-                <a:spcPts val="600"/>
-              </a:spcBef>
-              <a:spcAft>
-                <a:spcPts val="600"/>
-              </a:spcAft>
-              <a:defRPr sz="1600">
-                <a:solidFill>
-                  <a:srgbClr val="323232"/>
-                </a:solidFill>
-              </a:defRPr>
-            </a:pPr>
-            <a:r>
-              <a:t>Forward TextFrame downstream</a:t>
-            </a:r>
-          </a:p>
-          <a:p>
-            <a:pPr lvl="1">
-              <a:spcBef>
-                <a:spcPts val="600"/>
-              </a:spcBef>
-              <a:spcAft>
-                <a:spcPts val="600"/>
-              </a:spcAft>
-              <a:defRPr sz="1600">
-                <a:solidFill>
-                  <a:srgbClr val="323232"/>
-                </a:solidFill>
-              </a:defRPr>
-            </a:pPr>
-            <a:r>
-              <a:t>Enable TTS to receive responses</a:t>
-            </a:r>
-          </a:p>
-          <a:p>
-            <a:pPr>
-              <a:spcBef>
-                <a:spcPts val="600"/>
-              </a:spcBef>
-              <a:spcAft>
-                <a:spcPts val="600"/>
-              </a:spcAft>
-              <a:defRPr sz="1800">
-                <a:solidFill>
-                  <a:srgbClr val="323232"/>
-                </a:solidFill>
-              </a:defRPr>
-            </a:pPr>
-          </a:p>
-          <a:p>
-            <a:pPr>
-              <a:spcBef>
-                <a:spcPts val="600"/>
-              </a:spcBef>
-              <a:spcAft>
-                <a:spcPts val="600"/>
-              </a:spcAft>
-              <a:defRPr sz="1800">
-                <a:solidFill>
-                  <a:srgbClr val="323232"/>
-                </a:solidFill>
-              </a:defRPr>
-            </a:pPr>
-            <a:r>
-              <a:t>3. Audio Connector Management:</a:t>
-            </a:r>
-          </a:p>
-          <a:p>
-            <a:pPr lvl="1">
-              <a:spcBef>
-                <a:spcPts val="600"/>
-              </a:spcBef>
-              <a:spcAft>
-                <a:spcPts val="600"/>
-              </a:spcAft>
-              <a:defRPr sz="1600">
-                <a:solidFill>
-                  <a:srgbClr val="323232"/>
-                </a:solidFill>
-              </a:defRPr>
-            </a:pPr>
-            <a:r>
-              <a:t>Stop all old connectors on new connection</a:t>
-            </a:r>
-          </a:p>
-          <a:p>
-            <a:pPr lvl="1">
-              <a:spcBef>
-                <a:spcPts val="600"/>
-              </a:spcBef>
-              <a:spcAft>
-                <a:spcPts val="600"/>
-              </a:spcAft>
-              <a:defRPr sz="1600">
-                <a:solidFill>
-                  <a:srgbClr val="323232"/>
-                </a:solidFill>
-              </a:defRPr>
-            </a:pPr>
-            <a:r>
-              <a:t>Prevent memory leaks</a:t>
+              <a:t>LM Studio:</a:t>
+            </a:r>
+          </a:p>
+          <a:p>
+            <a:pPr lvl="1">
+              <a:spcBef>
+                <a:spcPts val="600"/>
+              </a:spcBef>
+              <a:spcAft>
+                <a:spcPts val="600"/>
+              </a:spcAft>
+              <a:defRPr sz="1600">
+                <a:solidFill>
+                  <a:srgbClr val="323232"/>
+                </a:solidFill>
+              </a:defRPr>
+            </a:pPr>
+            <a:r>
+              <a:t>LM_STUDIO_BASE_URL=http://localhost:1234/v1</a:t>
+            </a:r>
+          </a:p>
+          <a:p>
+            <a:pPr lvl="1">
+              <a:spcBef>
+                <a:spcPts val="600"/>
+              </a:spcBef>
+              <a:spcAft>
+                <a:spcPts val="600"/>
+              </a:spcAft>
+              <a:defRPr sz="1600">
+                <a:solidFill>
+                  <a:srgbClr val="323232"/>
+                </a:solidFill>
+              </a:defRPr>
+            </a:pPr>
+            <a:r>
+              <a:t>LM_MODEL=gemma-4-26B-A4B-it-MLX-8bit</a:t>
+            </a:r>
+          </a:p>
+          <a:p>
+            <a:pPr lvl="1">
+              <a:spcBef>
+                <a:spcPts val="600"/>
+              </a:spcBef>
+              <a:spcAft>
+                <a:spcPts val="600"/>
+              </a:spcAft>
+              <a:defRPr sz="1600">
+                <a:solidFill>
+                  <a:srgbClr val="323232"/>
+                </a:solidFill>
+              </a:defRPr>
+            </a:pPr>
+            <a:r>
+              <a:t>STT_LANGUAGE=ja</a:t>
+            </a:r>
+          </a:p>
+          <a:p>
+            <a:pPr>
+              <a:spcBef>
+                <a:spcPts val="600"/>
+              </a:spcBef>
+              <a:spcAft>
+                <a:spcPts val="600"/>
+              </a:spcAft>
+              <a:defRPr sz="1800">
+                <a:solidFill>
+                  <a:srgbClr val="323232"/>
+                </a:solidFill>
+              </a:defRPr>
+            </a:pPr>
+          </a:p>
+          <a:p>
+            <a:pPr>
+              <a:spcBef>
+                <a:spcPts val="600"/>
+              </a:spcBef>
+              <a:spcAft>
+                <a:spcPts val="600"/>
+              </a:spcAft>
+              <a:defRPr sz="1800">
+                <a:solidFill>
+                  <a:srgbClr val="323232"/>
+                </a:solidFill>
+              </a:defRPr>
+            </a:pPr>
+            <a:r>
+              <a:t>Vonage:</a:t>
+            </a:r>
+          </a:p>
+          <a:p>
+            <a:pPr lvl="1">
+              <a:spcBef>
+                <a:spcPts val="600"/>
+              </a:spcBef>
+              <a:spcAft>
+                <a:spcPts val="600"/>
+              </a:spcAft>
+              <a:defRPr sz="1600">
+                <a:solidFill>
+                  <a:srgbClr val="323232"/>
+                </a:solidFill>
+              </a:defRPr>
+            </a:pPr>
+            <a:r>
+              <a:t>VONAGE_APPLICATION_ID=&lt;your-app-id&gt;</a:t>
+            </a:r>
+          </a:p>
+          <a:p>
+            <a:pPr lvl="1">
+              <a:spcBef>
+                <a:spcPts val="600"/>
+              </a:spcBef>
+              <a:spcAft>
+                <a:spcPts val="600"/>
+              </a:spcAft>
+              <a:defRPr sz="1600">
+                <a:solidFill>
+                  <a:srgbClr val="323232"/>
+                </a:solidFill>
+              </a:defRPr>
+            </a:pPr>
+            <a:r>
+              <a:t>VONAGE_PRIVATE_KEY=&lt;path-or-raw-key&gt;</a:t>
+            </a:r>
+          </a:p>
+          <a:p>
+            <a:pPr lvl="1">
+              <a:spcBef>
+                <a:spcPts val="600"/>
+              </a:spcBef>
+              <a:spcAft>
+                <a:spcPts val="600"/>
+              </a:spcAft>
+              <a:defRPr sz="1600">
+                <a:solidFill>
+                  <a:srgbClr val="323232"/>
+                </a:solidFill>
+              </a:defRPr>
+            </a:pPr>
+            <a:r>
+              <a:t>VONAGE_AUDIO_RATE=16000</a:t>
+            </a:r>
+          </a:p>
+          <a:p>
+            <a:pPr lvl="1">
+              <a:spcBef>
+                <a:spcPts val="600"/>
+              </a:spcBef>
+              <a:spcAft>
+                <a:spcPts val="600"/>
+              </a:spcAft>
+              <a:defRPr sz="1600">
+                <a:solidFill>
+                  <a:srgbClr val="323232"/>
+                </a:solidFill>
+              </a:defRPr>
+            </a:pPr>
+            <a:r>
+              <a:t>WS_URI=wss://&lt;tunnel-url&gt;/ws (optional)</a:t>
             </a:r>
           </a:p>
         </p:txBody>
@@ -4864,7 +4526,7 @@
               </a:defRPr>
             </a:pPr>
             <a:r>
-              <a:t>Error Handling</a:t>
+              <a:t>Startup Steps</a:t>
             </a:r>
           </a:p>
         </p:txBody>
@@ -4905,199 +4567,211 @@
               </a:defRPr>
             </a:pPr>
             <a:r>
-              <a:t>Server Side:</a:t>
-            </a:r>
-          </a:p>
-          <a:p>
-            <a:pPr lvl="1">
-              <a:spcBef>
-                <a:spcPts val="600"/>
-              </a:spcBef>
-              <a:spcAft>
-                <a:spcPts val="600"/>
-              </a:spcAft>
-              <a:defRPr sz="1600">
-                <a:solidFill>
-                  <a:srgbClr val="323232"/>
-                </a:solidFill>
-              </a:defRPr>
-            </a:pPr>
-            <a:r>
-              <a:t>WebSocket disconnect → cleanup in finally block</a:t>
-            </a:r>
-          </a:p>
-          <a:p>
-            <a:pPr lvl="1">
-              <a:spcBef>
-                <a:spcPts val="600"/>
-              </a:spcBef>
-              <a:spcAft>
-                <a:spcPts val="600"/>
-              </a:spcAft>
-              <a:defRPr sz="1600">
-                <a:solidFill>
-                  <a:srgbClr val="323232"/>
-                </a:solidFill>
-              </a:defRPr>
-            </a:pPr>
-            <a:r>
-              <a:t>Model load failure → log and continue (runtime error)</a:t>
-            </a:r>
-          </a:p>
-          <a:p>
-            <a:pPr lvl="1">
-              <a:spcBef>
-                <a:spcPts val="600"/>
-              </a:spcBef>
-              <a:spcAft>
-                <a:spcPts val="600"/>
-              </a:spcAft>
-              <a:defRPr sz="1600">
-                <a:solidFill>
-                  <a:srgbClr val="323232"/>
-                </a:solidFill>
-              </a:defRPr>
-            </a:pPr>
-            <a:r>
-              <a:t>Connector stop failure → warning log only</a:t>
-            </a:r>
-          </a:p>
-          <a:p>
-            <a:pPr>
-              <a:spcBef>
-                <a:spcPts val="600"/>
-              </a:spcBef>
-              <a:spcAft>
-                <a:spcPts val="600"/>
-              </a:spcAft>
-              <a:defRPr sz="1800">
-                <a:solidFill>
-                  <a:srgbClr val="323232"/>
-                </a:solidFill>
-              </a:defRPr>
-            </a:pPr>
-          </a:p>
-          <a:p>
-            <a:pPr>
-              <a:spcBef>
-                <a:spcPts val="600"/>
-              </a:spcBef>
-              <a:spcAft>
-                <a:spcPts val="600"/>
-              </a:spcAft>
-              <a:defRPr sz="1800">
-                <a:solidFill>
-                  <a:srgbClr val="323232"/>
-                </a:solidFill>
-              </a:defRPr>
-            </a:pPr>
-            <a:r>
-              <a:t>Pipeline Side:</a:t>
-            </a:r>
-          </a:p>
-          <a:p>
-            <a:pPr lvl="1">
-              <a:spcBef>
-                <a:spcPts val="600"/>
-              </a:spcBef>
-              <a:spcAft>
-                <a:spcPts val="600"/>
-              </a:spcAft>
-              <a:defRPr sz="1600">
-                <a:solidFill>
-                  <a:srgbClr val="323232"/>
-                </a:solidFill>
-              </a:defRPr>
-            </a:pPr>
-            <a:r>
-              <a:t>STT timeout → cancel _ttfb_timeout_task</a:t>
-            </a:r>
-          </a:p>
-          <a:p>
-            <a:pPr lvl="1">
-              <a:spcBef>
-                <a:spcPts val="600"/>
-              </a:spcBef>
-              <a:spcAft>
-                <a:spcPts val="600"/>
-              </a:spcAft>
-              <a:defRPr sz="1600">
-                <a:solidFill>
-                  <a:srgbClr val="323232"/>
-                </a:solidFill>
-              </a:defRPr>
-            </a:pPr>
-            <a:r>
-              <a:t>LLM error → exception log → end session</a:t>
-            </a:r>
-          </a:p>
-          <a:p>
-            <a:pPr>
-              <a:spcBef>
-                <a:spcPts val="600"/>
-              </a:spcBef>
-              <a:spcAft>
-                <a:spcPts val="600"/>
-              </a:spcAft>
-              <a:defRPr sz="1800">
-                <a:solidFill>
-                  <a:srgbClr val="323232"/>
-                </a:solidFill>
-              </a:defRPr>
-            </a:pPr>
-          </a:p>
-          <a:p>
-            <a:pPr>
-              <a:spcBef>
-                <a:spcPts val="600"/>
-              </a:spcBef>
-              <a:spcAft>
-                <a:spcPts val="600"/>
-              </a:spcAft>
-              <a:defRPr sz="1800">
-                <a:solidFill>
-                  <a:srgbClr val="323232"/>
-                </a:solidFill>
-              </a:defRPr>
-            </a:pPr>
-            <a:r>
-              <a:t>Browser Side:</a:t>
-            </a:r>
-          </a:p>
-          <a:p>
-            <a:pPr lvl="1">
-              <a:spcBef>
-                <a:spcPts val="600"/>
-              </a:spcBef>
-              <a:spcAft>
-                <a:spcPts val="600"/>
-              </a:spcAft>
-              <a:defRPr sz="1600">
-                <a:solidFill>
-                  <a:srgbClr val="323232"/>
-                </a:solidFill>
-              </a:defRPr>
-            </a:pPr>
-            <a:r>
-              <a:t>Connection failure → show status</a:t>
-            </a:r>
-          </a:p>
-          <a:p>
-            <a:pPr lvl="1">
-              <a:spcBef>
-                <a:spcPts val="600"/>
-              </a:spcBef>
-              <a:spcAft>
-                <a:spcPts val="600"/>
-              </a:spcAft>
-              <a:defRPr sz="1600">
-                <a:solidFill>
-                  <a:srgbClr val="323232"/>
-                </a:solidFill>
-              </a:defRPr>
-            </a:pPr>
-            <a:r>
-              <a:t>Stream receive failure → log only (continue UI)</a:t>
+              <a:t>1. Start LM Studio on localhost:1234</a:t>
+            </a:r>
+          </a:p>
+          <a:p>
+            <a:pPr lvl="1">
+              <a:spcBef>
+                <a:spcPts val="600"/>
+              </a:spcBef>
+              <a:spcAft>
+                <a:spcPts val="600"/>
+              </a:spcAft>
+              <a:defRPr sz="1600">
+                <a:solidFill>
+                  <a:srgbClr val="323232"/>
+                </a:solidFill>
+              </a:defRPr>
+            </a:pPr>
+            <a:r>
+              <a:t>Load a model (Gemma/Llama etc)</a:t>
+            </a:r>
+          </a:p>
+          <a:p>
+            <a:pPr>
+              <a:spcBef>
+                <a:spcPts val="600"/>
+              </a:spcBef>
+              <a:spcAft>
+                <a:spcPts val="600"/>
+              </a:spcAft>
+              <a:defRPr sz="1800">
+                <a:solidFill>
+                  <a:srgbClr val="323232"/>
+                </a:solidFill>
+              </a:defRPr>
+            </a:pPr>
+          </a:p>
+          <a:p>
+            <a:pPr>
+              <a:spcBef>
+                <a:spcPts val="600"/>
+              </a:spcBef>
+              <a:spcAft>
+                <a:spcPts val="600"/>
+              </a:spcAft>
+              <a:defRPr sz="1800">
+                <a:solidFill>
+                  <a:srgbClr val="323232"/>
+                </a:solidFill>
+              </a:defRPr>
+            </a:pPr>
+            <a:r>
+              <a:t>2. Configure repository with .env file</a:t>
+            </a:r>
+          </a:p>
+          <a:p>
+            <a:pPr>
+              <a:spcBef>
+                <a:spcPts val="600"/>
+              </a:spcBef>
+              <a:spcAft>
+                <a:spcPts val="600"/>
+              </a:spcAft>
+              <a:defRPr sz="1800">
+                <a:solidFill>
+                  <a:srgbClr val="323232"/>
+                </a:solidFill>
+              </a:defRPr>
+            </a:pPr>
+          </a:p>
+          <a:p>
+            <a:pPr>
+              <a:spcBef>
+                <a:spcPts val="600"/>
+              </a:spcBef>
+              <a:spcAft>
+                <a:spcPts val="600"/>
+              </a:spcAft>
+              <a:defRPr sz="1800">
+                <a:solidFill>
+                  <a:srgbClr val="323232"/>
+                </a:solidFill>
+              </a:defRPr>
+            </a:pPr>
+            <a:r>
+              <a:t>3. Expose with Cloudflare Tunnel</a:t>
+            </a:r>
+          </a:p>
+          <a:p>
+            <a:pPr lvl="1">
+              <a:spcBef>
+                <a:spcPts val="600"/>
+              </a:spcBef>
+              <a:spcAft>
+                <a:spcPts val="600"/>
+              </a:spcAft>
+              <a:defRPr sz="1600">
+                <a:solidFill>
+                  <a:srgbClr val="323232"/>
+                </a:solidFill>
+              </a:defRPr>
+            </a:pPr>
+            <a:r>
+              <a:t>cloudflared tunnel run pipecat</a:t>
+            </a:r>
+          </a:p>
+          <a:p>
+            <a:pPr>
+              <a:spcBef>
+                <a:spcPts val="600"/>
+              </a:spcBef>
+              <a:spcAft>
+                <a:spcPts val="600"/>
+              </a:spcAft>
+              <a:defRPr sz="1800">
+                <a:solidFill>
+                  <a:srgbClr val="323232"/>
+                </a:solidFill>
+              </a:defRPr>
+            </a:pPr>
+          </a:p>
+          <a:p>
+            <a:pPr>
+              <a:spcBef>
+                <a:spcPts val="600"/>
+              </a:spcBef>
+              <a:spcAft>
+                <a:spcPts val="600"/>
+              </a:spcAft>
+              <a:defRPr sz="1800">
+                <a:solidFill>
+                  <a:srgbClr val="323232"/>
+                </a:solidFill>
+              </a:defRPr>
+            </a:pPr>
+            <a:r>
+              <a:t>4. Start FastAPI server</a:t>
+            </a:r>
+          </a:p>
+          <a:p>
+            <a:pPr lvl="1">
+              <a:spcBef>
+                <a:spcPts val="600"/>
+              </a:spcBef>
+              <a:spcAft>
+                <a:spcPts val="600"/>
+              </a:spcAft>
+              <a:defRPr sz="1600">
+                <a:solidFill>
+                  <a:srgbClr val="323232"/>
+                </a:solidFill>
+              </a:defRPr>
+            </a:pPr>
+            <a:r>
+              <a:t>python server.py</a:t>
+            </a:r>
+          </a:p>
+          <a:p>
+            <a:pPr>
+              <a:spcBef>
+                <a:spcPts val="600"/>
+              </a:spcBef>
+              <a:spcAft>
+                <a:spcPts val="600"/>
+              </a:spcAft>
+              <a:defRPr sz="1800">
+                <a:solidFill>
+                  <a:srgbClr val="323232"/>
+                </a:solidFill>
+              </a:defRPr>
+            </a:pPr>
+          </a:p>
+          <a:p>
+            <a:pPr>
+              <a:spcBef>
+                <a:spcPts val="600"/>
+              </a:spcBef>
+              <a:spcAft>
+                <a:spcPts val="600"/>
+              </a:spcAft>
+              <a:defRPr sz="1800">
+                <a:solidFill>
+                  <a:srgbClr val="323232"/>
+                </a:solidFill>
+              </a:defRPr>
+            </a:pPr>
+            <a:r>
+              <a:t>5. Open Tunnel URL in browser</a:t>
+            </a:r>
+          </a:p>
+          <a:p>
+            <a:pPr>
+              <a:spcBef>
+                <a:spcPts val="600"/>
+              </a:spcBef>
+              <a:spcAft>
+                <a:spcPts val="600"/>
+              </a:spcAft>
+              <a:defRPr sz="1800">
+                <a:solidFill>
+                  <a:srgbClr val="323232"/>
+                </a:solidFill>
+              </a:defRPr>
+            </a:pPr>
+            <a:r>
+              <a:t>6. Click 'Connect' button → Voice conversation starts</a:t>
             </a:r>
           </a:p>
         </p:txBody>
@@ -5158,7 +4832,7 @@
               </a:defRPr>
             </a:pPr>
             <a:r>
-              <a:t>Performance &amp; Optimization</a:t>
+              <a:t>Pipeline Configuration Details</a:t>
             </a:r>
           </a:p>
         </p:txBody>
@@ -5199,214 +4873,199 @@
               </a:defRPr>
             </a:pPr>
             <a:r>
-              <a:t>Model Pre-loading:</a:t>
-            </a:r>
-          </a:p>
-          <a:p>
-            <a:pPr lvl="1">
-              <a:spcBef>
-                <a:spcPts val="600"/>
-              </a:spcBef>
-              <a:spcAft>
-                <a:spcPts val="600"/>
-              </a:spcAft>
-              <a:defRPr sz="1600">
-                <a:solidFill>
-                  <a:srgbClr val="323232"/>
-                </a:solidFill>
-              </a:defRPr>
-            </a:pPr>
-            <a:r>
-              <a:t>preload_models() on startup loads all models to memory</a:t>
-            </a:r>
-          </a:p>
-          <a:p>
-            <a:pPr lvl="1">
-              <a:spcBef>
-                <a:spcPts val="600"/>
-              </a:spcBef>
-              <a:spcAft>
-                <a:spcPts val="600"/>
-              </a:spcAft>
-              <a:defRPr sz="1600">
-                <a:solidFill>
-                  <a:srgbClr val="323232"/>
-                </a:solidFill>
-              </a:defRPr>
-            </a:pPr>
-            <a:r>
-              <a:t>Eliminates first-connection delay</a:t>
-            </a:r>
-          </a:p>
-          <a:p>
-            <a:pPr>
-              <a:spcBef>
-                <a:spcPts val="600"/>
-              </a:spcBef>
-              <a:spcAft>
-                <a:spcPts val="600"/>
-              </a:spcAft>
-              <a:defRPr sz="1800">
-                <a:solidFill>
-                  <a:srgbClr val="323232"/>
-                </a:solidFill>
-              </a:defRPr>
-            </a:pPr>
-          </a:p>
-          <a:p>
-            <a:pPr>
-              <a:spcBef>
-                <a:spcPts val="600"/>
-              </a:spcBef>
-              <a:spcAft>
-                <a:spcPts val="600"/>
-              </a:spcAft>
-              <a:defRPr sz="1800">
-                <a:solidFill>
-                  <a:srgbClr val="323232"/>
-                </a:solidFill>
-              </a:defRPr>
-            </a:pPr>
-            <a:r>
-              <a:t>Whisper MLX:</a:t>
-            </a:r>
-          </a:p>
-          <a:p>
-            <a:pPr lvl="1">
-              <a:spcBef>
-                <a:spcPts val="600"/>
-              </a:spcBef>
-              <a:spcAft>
-                <a:spcPts val="600"/>
-              </a:spcAft>
-              <a:defRPr sz="1600">
-                <a:solidFill>
-                  <a:srgbClr val="323232"/>
-                </a:solidFill>
-              </a:defRPr>
-            </a:pPr>
-            <a:r>
-              <a:t>LARGE_V3_TURBO_Q4: Fast, high-accuracy (recommended)</a:t>
-            </a:r>
-          </a:p>
-          <a:p>
-            <a:pPr>
-              <a:spcBef>
-                <a:spcPts val="600"/>
-              </a:spcBef>
-              <a:spcAft>
-                <a:spcPts val="600"/>
-              </a:spcAft>
-              <a:defRPr sz="1800">
-                <a:solidFill>
-                  <a:srgbClr val="323232"/>
-                </a:solidFill>
-              </a:defRPr>
-            </a:pPr>
-          </a:p>
-          <a:p>
-            <a:pPr>
-              <a:spcBef>
-                <a:spcPts val="600"/>
-              </a:spcBef>
-              <a:spcAft>
-                <a:spcPts val="600"/>
-              </a:spcAft>
-              <a:defRPr sz="1800">
-                <a:solidFill>
-                  <a:srgbClr val="323232"/>
-                </a:solidFill>
-              </a:defRPr>
-            </a:pPr>
-            <a:r>
-              <a:t>Async Processing:</a:t>
-            </a:r>
-          </a:p>
-          <a:p>
-            <a:pPr lvl="1">
-              <a:spcBef>
-                <a:spcPts val="600"/>
-              </a:spcBef>
-              <a:spcAft>
-                <a:spcPts val="600"/>
-              </a:spcAft>
-              <a:defRPr sz="1600">
-                <a:solidFill>
-                  <a:srgbClr val="323232"/>
-                </a:solidFill>
-              </a:defRPr>
-            </a:pPr>
-            <a:r>
-              <a:t>asyncio avoids I/O blocking</a:t>
-            </a:r>
-          </a:p>
-          <a:p>
-            <a:pPr lvl="1">
-              <a:spcBef>
-                <a:spcPts val="600"/>
-              </a:spcBef>
-              <a:spcAft>
-                <a:spcPts val="600"/>
-              </a:spcAft>
-              <a:defRPr sz="1600">
-                <a:solidFill>
-                  <a:srgbClr val="323232"/>
-                </a:solidFill>
-              </a:defRPr>
-            </a:pPr>
-            <a:r>
-              <a:t>Parallel processing achieves low-latency</a:t>
-            </a:r>
-          </a:p>
-          <a:p>
-            <a:pPr>
-              <a:spcBef>
-                <a:spcPts val="600"/>
-              </a:spcBef>
-              <a:spcAft>
-                <a:spcPts val="600"/>
-              </a:spcAft>
-              <a:defRPr sz="1800">
-                <a:solidFill>
-                  <a:srgbClr val="323232"/>
-                </a:solidFill>
-              </a:defRPr>
-            </a:pPr>
-          </a:p>
-          <a:p>
-            <a:pPr>
-              <a:spcBef>
-                <a:spcPts val="600"/>
-              </a:spcBef>
-              <a:spcAft>
-                <a:spcPts val="600"/>
-              </a:spcAft>
-              <a:defRPr sz="1800">
-                <a:solidFill>
-                  <a:srgbClr val="323232"/>
-                </a:solidFill>
-              </a:defRPr>
-            </a:pPr>
-            <a:r>
-              <a:t>Greeting Strategy:</a:t>
-            </a:r>
-          </a:p>
-          <a:p>
-            <a:pPr lvl="1">
-              <a:spcBef>
-                <a:spcPts val="600"/>
-              </a:spcBef>
-              <a:spcAft>
-                <a:spcPts val="600"/>
-              </a:spcAft>
-              <a:defRPr sz="1600">
-                <a:solidFill>
-                  <a:srgbClr val="323232"/>
-                </a:solidFill>
-              </a:defRPr>
-            </a:pPr>
-            <a:r>
-              <a:t>Immediate + Delayed to handle network latency</a:t>
+              <a:t>VAD (Voice Activity Detection):</a:t>
+            </a:r>
+          </a:p>
+          <a:p>
+            <a:pPr lvl="1">
+              <a:spcBef>
+                <a:spcPts val="600"/>
+              </a:spcBef>
+              <a:spcAft>
+                <a:spcPts val="600"/>
+              </a:spcAft>
+              <a:defRPr sz="1600">
+                <a:solidFill>
+                  <a:srgbClr val="323232"/>
+                </a:solidFill>
+              </a:defRPr>
+            </a:pPr>
+            <a:r>
+              <a:t>Confidence: 0.5</a:t>
+            </a:r>
+          </a:p>
+          <a:p>
+            <a:pPr lvl="1">
+              <a:spcBef>
+                <a:spcPts val="600"/>
+              </a:spcBef>
+              <a:spcAft>
+                <a:spcPts val="600"/>
+              </a:spcAft>
+              <a:defRPr sz="1600">
+                <a:solidFill>
+                  <a:srgbClr val="323232"/>
+                </a:solidFill>
+              </a:defRPr>
+            </a:pPr>
+            <a:r>
+              <a:t>Speech Start: 0.2 sec</a:t>
+            </a:r>
+          </a:p>
+          <a:p>
+            <a:pPr lvl="1">
+              <a:spcBef>
+                <a:spcPts val="600"/>
+              </a:spcBef>
+              <a:spcAft>
+                <a:spcPts val="600"/>
+              </a:spcAft>
+              <a:defRPr sz="1600">
+                <a:solidFill>
+                  <a:srgbClr val="323232"/>
+                </a:solidFill>
+              </a:defRPr>
+            </a:pPr>
+            <a:r>
+              <a:t>Silence Detection: 0.2 sec</a:t>
+            </a:r>
+          </a:p>
+          <a:p>
+            <a:pPr lvl="1">
+              <a:spcBef>
+                <a:spcPts val="600"/>
+              </a:spcBef>
+              <a:spcAft>
+                <a:spcPts val="600"/>
+              </a:spcAft>
+              <a:defRPr sz="1600">
+                <a:solidFill>
+                  <a:srgbClr val="323232"/>
+                </a:solidFill>
+              </a:defRPr>
+            </a:pPr>
+            <a:r>
+              <a:t>Idle: 1.0 sec</a:t>
+            </a:r>
+          </a:p>
+          <a:p>
+            <a:pPr>
+              <a:spcBef>
+                <a:spcPts val="600"/>
+              </a:spcBef>
+              <a:spcAft>
+                <a:spcPts val="600"/>
+              </a:spcAft>
+              <a:defRPr sz="1800">
+                <a:solidFill>
+                  <a:srgbClr val="323232"/>
+                </a:solidFill>
+              </a:defRPr>
+            </a:pPr>
+          </a:p>
+          <a:p>
+            <a:pPr>
+              <a:spcBef>
+                <a:spcPts val="600"/>
+              </a:spcBef>
+              <a:spcAft>
+                <a:spcPts val="600"/>
+              </a:spcAft>
+              <a:defRPr sz="1800">
+                <a:solidFill>
+                  <a:srgbClr val="323232"/>
+                </a:solidFill>
+              </a:defRPr>
+            </a:pPr>
+            <a:r>
+              <a:t>STT:</a:t>
+            </a:r>
+          </a:p>
+          <a:p>
+            <a:pPr lvl="1">
+              <a:spcBef>
+                <a:spcPts val="600"/>
+              </a:spcBef>
+              <a:spcAft>
+                <a:spcPts val="600"/>
+              </a:spcAft>
+              <a:defRPr sz="1600">
+                <a:solidFill>
+                  <a:srgbClr val="323232"/>
+                </a:solidFill>
+              </a:defRPr>
+            </a:pPr>
+            <a:r>
+              <a:t>Language: Japanese (ja)</a:t>
+            </a:r>
+          </a:p>
+          <a:p>
+            <a:pPr lvl="1">
+              <a:spcBef>
+                <a:spcPts val="600"/>
+              </a:spcBef>
+              <a:spcAft>
+                <a:spcPts val="600"/>
+              </a:spcAft>
+              <a:defRPr sz="1600">
+                <a:solidFill>
+                  <a:srgbClr val="323232"/>
+                </a:solidFill>
+              </a:defRPr>
+            </a:pPr>
+            <a:r>
+              <a:t>no_speech_prob: 0.3 (adjust silence threshold)</a:t>
+            </a:r>
+          </a:p>
+          <a:p>
+            <a:pPr>
+              <a:spcBef>
+                <a:spcPts val="600"/>
+              </a:spcBef>
+              <a:spcAft>
+                <a:spcPts val="600"/>
+              </a:spcAft>
+              <a:defRPr sz="1800">
+                <a:solidFill>
+                  <a:srgbClr val="323232"/>
+                </a:solidFill>
+              </a:defRPr>
+            </a:pPr>
+          </a:p>
+          <a:p>
+            <a:pPr>
+              <a:spcBef>
+                <a:spcPts val="600"/>
+              </a:spcBef>
+              <a:spcAft>
+                <a:spcPts val="600"/>
+              </a:spcAft>
+              <a:defRPr sz="1800">
+                <a:solidFill>
+                  <a:srgbClr val="323232"/>
+                </a:solidFill>
+              </a:defRPr>
+            </a:pPr>
+            <a:r>
+              <a:t>LLM:</a:t>
+            </a:r>
+          </a:p>
+          <a:p>
+            <a:pPr lvl="1">
+              <a:spcBef>
+                <a:spcPts val="600"/>
+              </a:spcBef>
+              <a:spcAft>
+                <a:spcPts val="600"/>
+              </a:spcAft>
+              <a:defRPr sz="1600">
+                <a:solidFill>
+                  <a:srgbClr val="323232"/>
+                </a:solidFill>
+              </a:defRPr>
+            </a:pPr>
+            <a:r>
+              <a:t>System Prompt: Japanese, concise, TTS-compatible</a:t>
             </a:r>
           </a:p>
         </p:txBody>
@@ -5467,7 +5126,7 @@
               </a:defRPr>
             </a:pPr>
             <a:r>
-              <a:t>Security Considerations</a:t>
+              <a:t>Important Technical Approaches</a:t>
             </a:r>
           </a:p>
         </p:txBody>
@@ -5508,181 +5167,181 @@
               </a:defRPr>
             </a:pPr>
             <a:r>
-              <a:t>Privacy:</a:t>
-            </a:r>
-          </a:p>
-          <a:p>
-            <a:pPr lvl="1">
-              <a:spcBef>
-                <a:spcPts val="600"/>
-              </a:spcBef>
-              <a:spcAft>
-                <a:spcPts val="600"/>
-              </a:spcAft>
-              <a:defRPr sz="1600">
-                <a:solidFill>
-                  <a:srgbClr val="323232"/>
-                </a:solidFill>
-              </a:defRPr>
-            </a:pPr>
-            <a:r>
-              <a:t>All processing runs locally → no data sent externally</a:t>
-            </a:r>
-          </a:p>
-          <a:p>
-            <a:pPr lvl="1">
-              <a:spcBef>
-                <a:spcPts val="600"/>
-              </a:spcBef>
-              <a:spcAft>
-                <a:spcPts val="600"/>
-              </a:spcAft>
-              <a:defRPr sz="1600">
-                <a:solidFill>
-                  <a:srgbClr val="323232"/>
-                </a:solidFill>
-              </a:defRPr>
-            </a:pPr>
-            <a:r>
-              <a:t>LLM/STT/TTS run in LM Studio</a:t>
-            </a:r>
-          </a:p>
-          <a:p>
-            <a:pPr>
-              <a:spcBef>
-                <a:spcPts val="600"/>
-              </a:spcBef>
-              <a:spcAft>
-                <a:spcPts val="600"/>
-              </a:spcAft>
-              <a:defRPr sz="1800">
-                <a:solidFill>
-                  <a:srgbClr val="323232"/>
-                </a:solidFill>
-              </a:defRPr>
-            </a:pPr>
-          </a:p>
-          <a:p>
-            <a:pPr>
-              <a:spcBef>
-                <a:spcPts val="600"/>
-              </a:spcBef>
-              <a:spcAft>
-                <a:spcPts val="600"/>
-              </a:spcAft>
-              <a:defRPr sz="1800">
-                <a:solidFill>
-                  <a:srgbClr val="323232"/>
-                </a:solidFill>
-              </a:defRPr>
-            </a:pPr>
-            <a:r>
-              <a:t>Authentication &amp; Authorization:</a:t>
-            </a:r>
-          </a:p>
-          <a:p>
-            <a:pPr lvl="1">
-              <a:spcBef>
-                <a:spcPts val="600"/>
-              </a:spcBef>
-              <a:spcAft>
-                <a:spcPts val="600"/>
-              </a:spcAft>
-              <a:defRPr sz="1600">
-                <a:solidFill>
-                  <a:srgbClr val="323232"/>
-                </a:solidFill>
-              </a:defRPr>
-            </a:pPr>
-            <a:r>
-              <a:t>Vonage API secured by SDK (private key management)</a:t>
-            </a:r>
-          </a:p>
-          <a:p>
-            <a:pPr lvl="1">
-              <a:spcBef>
-                <a:spcPts val="600"/>
-              </a:spcBef>
-              <a:spcAft>
-                <a:spcPts val="600"/>
-              </a:spcAft>
-              <a:defRPr sz="1600">
-                <a:solidFill>
-                  <a:srgbClr val="323232"/>
-                </a:solidFill>
-              </a:defRPr>
-            </a:pPr>
-            <a:r>
-              <a:t>Secrets managed in environment variables (.env)</a:t>
-            </a:r>
-          </a:p>
-          <a:p>
-            <a:pPr>
-              <a:spcBef>
-                <a:spcPts val="600"/>
-              </a:spcBef>
-              <a:spcAft>
-                <a:spcPts val="600"/>
-              </a:spcAft>
-              <a:defRPr sz="1800">
-                <a:solidFill>
-                  <a:srgbClr val="323232"/>
-                </a:solidFill>
-              </a:defRPr>
-            </a:pPr>
-          </a:p>
-          <a:p>
-            <a:pPr>
-              <a:spcBef>
-                <a:spcPts val="600"/>
-              </a:spcBef>
-              <a:spcAft>
-                <a:spcPts val="600"/>
-              </a:spcAft>
-              <a:defRPr sz="1800">
-                <a:solidFill>
-                  <a:srgbClr val="323232"/>
-                </a:solidFill>
-              </a:defRPr>
-            </a:pPr>
-            <a:r>
-              <a:t>Communication:</a:t>
-            </a:r>
-          </a:p>
-          <a:p>
-            <a:pPr lvl="1">
-              <a:spcBef>
-                <a:spcPts val="600"/>
-              </a:spcBef>
-              <a:spcAft>
-                <a:spcPts val="600"/>
-              </a:spcAft>
-              <a:defRPr sz="1600">
-                <a:solidFill>
-                  <a:srgbClr val="323232"/>
-                </a:solidFill>
-              </a:defRPr>
-            </a:pPr>
-            <a:r>
-              <a:t>Tunnel URL encrypted with HTTPS/WSS</a:t>
-            </a:r>
-          </a:p>
-          <a:p>
-            <a:pPr lvl="1">
-              <a:spcBef>
-                <a:spcPts val="600"/>
-              </a:spcBef>
-              <a:spcAft>
-                <a:spcPts val="600"/>
-              </a:spcAft>
-              <a:defRPr sz="1600">
-                <a:solidFill>
-                  <a:srgbClr val="323232"/>
-                </a:solidFill>
-              </a:defRPr>
-            </a:pPr>
-            <a:r>
-              <a:t>WebSocket uses binary protocol for efficiency</a:t>
+              <a:t>1. State Reset (_reset_service):</a:t>
+            </a:r>
+          </a:p>
+          <a:p>
+            <a:pPr lvl="1">
+              <a:spcBef>
+                <a:spcPts val="600"/>
+              </a:spcBef>
+              <a:spcAft>
+                <a:spcPts val="600"/>
+              </a:spcAft>
+              <a:defRPr sz="1600">
+                <a:solidFill>
+                  <a:srgbClr val="323232"/>
+                </a:solidFill>
+              </a:defRPr>
+            </a:pPr>
+            <a:r>
+              <a:t>Clear LLM/STT/TTS internal state per connection</a:t>
+            </a:r>
+          </a:p>
+          <a:p>
+            <a:pPr lvl="1">
+              <a:spcBef>
+                <a:spcPts val="600"/>
+              </a:spcBef>
+              <a:spcAft>
+                <a:spcPts val="600"/>
+              </a:spcAft>
+              <a:defRPr sz="1600">
+                <a:solidFill>
+                  <a:srgbClr val="323232"/>
+                </a:solidFill>
+              </a:defRPr>
+            </a:pPr>
+            <a:r>
+              <a:t>Prevent cross-connection interference</a:t>
+            </a:r>
+          </a:p>
+          <a:p>
+            <a:pPr>
+              <a:spcBef>
+                <a:spcPts val="600"/>
+              </a:spcBef>
+              <a:spcAft>
+                <a:spcPts val="600"/>
+              </a:spcAft>
+              <a:defRPr sz="1800">
+                <a:solidFill>
+                  <a:srgbClr val="323232"/>
+                </a:solidFill>
+              </a:defRPr>
+            </a:pPr>
+          </a:p>
+          <a:p>
+            <a:pPr>
+              <a:spcBef>
+                <a:spcPts val="600"/>
+              </a:spcBef>
+              <a:spcAft>
+                <a:spcPts val="600"/>
+              </a:spcAft>
+              <a:defRPr sz="1800">
+                <a:solidFill>
+                  <a:srgbClr val="323232"/>
+                </a:solidFill>
+              </a:defRPr>
+            </a:pPr>
+            <a:r>
+              <a:t>2. Monkey-Patch (LLMAssistantAggregator):</a:t>
+            </a:r>
+          </a:p>
+          <a:p>
+            <a:pPr lvl="1">
+              <a:spcBef>
+                <a:spcPts val="600"/>
+              </a:spcBef>
+              <a:spcAft>
+                <a:spcPts val="600"/>
+              </a:spcAft>
+              <a:defRPr sz="1600">
+                <a:solidFill>
+                  <a:srgbClr val="323232"/>
+                </a:solidFill>
+              </a:defRPr>
+            </a:pPr>
+            <a:r>
+              <a:t>Forward TextFrame downstream</a:t>
+            </a:r>
+          </a:p>
+          <a:p>
+            <a:pPr lvl="1">
+              <a:spcBef>
+                <a:spcPts val="600"/>
+              </a:spcBef>
+              <a:spcAft>
+                <a:spcPts val="600"/>
+              </a:spcAft>
+              <a:defRPr sz="1600">
+                <a:solidFill>
+                  <a:srgbClr val="323232"/>
+                </a:solidFill>
+              </a:defRPr>
+            </a:pPr>
+            <a:r>
+              <a:t>Enable TTS to receive responses</a:t>
+            </a:r>
+          </a:p>
+          <a:p>
+            <a:pPr>
+              <a:spcBef>
+                <a:spcPts val="600"/>
+              </a:spcBef>
+              <a:spcAft>
+                <a:spcPts val="600"/>
+              </a:spcAft>
+              <a:defRPr sz="1800">
+                <a:solidFill>
+                  <a:srgbClr val="323232"/>
+                </a:solidFill>
+              </a:defRPr>
+            </a:pPr>
+          </a:p>
+          <a:p>
+            <a:pPr>
+              <a:spcBef>
+                <a:spcPts val="600"/>
+              </a:spcBef>
+              <a:spcAft>
+                <a:spcPts val="600"/>
+              </a:spcAft>
+              <a:defRPr sz="1800">
+                <a:solidFill>
+                  <a:srgbClr val="323232"/>
+                </a:solidFill>
+              </a:defRPr>
+            </a:pPr>
+            <a:r>
+              <a:t>3. Audio Connector Management:</a:t>
+            </a:r>
+          </a:p>
+          <a:p>
+            <a:pPr lvl="1">
+              <a:spcBef>
+                <a:spcPts val="600"/>
+              </a:spcBef>
+              <a:spcAft>
+                <a:spcPts val="600"/>
+              </a:spcAft>
+              <a:defRPr sz="1600">
+                <a:solidFill>
+                  <a:srgbClr val="323232"/>
+                </a:solidFill>
+              </a:defRPr>
+            </a:pPr>
+            <a:r>
+              <a:t>Stop all old connectors on new connection</a:t>
+            </a:r>
+          </a:p>
+          <a:p>
+            <a:pPr lvl="1">
+              <a:spcBef>
+                <a:spcPts val="600"/>
+              </a:spcBef>
+              <a:spcAft>
+                <a:spcPts val="600"/>
+              </a:spcAft>
+              <a:defRPr sz="1600">
+                <a:solidFill>
+                  <a:srgbClr val="323232"/>
+                </a:solidFill>
+              </a:defRPr>
+            </a:pPr>
+            <a:r>
+              <a:t>Prevent memory leaks</a:t>
             </a:r>
           </a:p>
         </p:txBody>
@@ -5743,7 +5402,7 @@
               </a:defRPr>
             </a:pPr>
             <a:r>
-              <a:t>Troubleshooting</a:t>
+              <a:t>Error Handling</a:t>
             </a:r>
           </a:p>
         </p:txBody>
@@ -5784,217 +5443,199 @@
               </a:defRPr>
             </a:pPr>
             <a:r>
-              <a:t>Cannot Connect:</a:t>
-            </a:r>
-          </a:p>
-          <a:p>
-            <a:pPr lvl="1">
-              <a:spcBef>
-                <a:spcPts val="600"/>
-              </a:spcBef>
-              <a:spcAft>
-                <a:spcPts val="600"/>
-              </a:spcAft>
-              <a:defRPr sz="1600">
-                <a:solidFill>
-                  <a:srgbClr val="323232"/>
-                </a:solidFill>
-              </a:defRPr>
-            </a:pPr>
-            <a:r>
-              <a:t>Verify LM Studio is running</a:t>
-            </a:r>
-          </a:p>
-          <a:p>
-            <a:pPr lvl="1">
-              <a:spcBef>
-                <a:spcPts val="600"/>
-              </a:spcBef>
-              <a:spcAft>
-                <a:spcPts val="600"/>
-              </a:spcAft>
-              <a:defRPr sz="1600">
-                <a:solidFill>
-                  <a:srgbClr val="323232"/>
-                </a:solidFill>
-              </a:defRPr>
-            </a:pPr>
-            <a:r>
-              <a:t>Check Tunnel URL is correct (WS_URI)</a:t>
-            </a:r>
-          </a:p>
-          <a:p>
-            <a:pPr lvl="1">
-              <a:spcBef>
-                <a:spcPts val="600"/>
-              </a:spcBef>
-              <a:spcAft>
-                <a:spcPts val="600"/>
-              </a:spcAft>
-              <a:defRPr sz="1600">
-                <a:solidFill>
-                  <a:srgbClr val="323232"/>
-                </a:solidFill>
-              </a:defRPr>
-            </a:pPr>
-            <a:r>
-              <a:t>Verify Vonage credentials are correct</a:t>
-            </a:r>
-          </a:p>
-          <a:p>
-            <a:pPr>
-              <a:spcBef>
-                <a:spcPts val="600"/>
-              </a:spcBef>
-              <a:spcAft>
-                <a:spcPts val="600"/>
-              </a:spcAft>
-              <a:defRPr sz="1800">
-                <a:solidFill>
-                  <a:srgbClr val="323232"/>
-                </a:solidFill>
-              </a:defRPr>
-            </a:pPr>
-          </a:p>
-          <a:p>
-            <a:pPr>
-              <a:spcBef>
-                <a:spcPts val="600"/>
-              </a:spcBef>
-              <a:spcAft>
-                <a:spcPts val="600"/>
-              </a:spcAft>
-              <a:defRPr sz="1800">
-                <a:solidFill>
-                  <a:srgbClr val="323232"/>
-                </a:solidFill>
-              </a:defRPr>
-            </a:pPr>
-            <a:r>
-              <a:t>Audio Cuts Out:</a:t>
-            </a:r>
-          </a:p>
-          <a:p>
-            <a:pPr lvl="1">
-              <a:spcBef>
-                <a:spcPts val="600"/>
-              </a:spcBef>
-              <a:spcAft>
-                <a:spcPts val="600"/>
-              </a:spcAft>
-              <a:defRPr sz="1600">
-                <a:solidFill>
-                  <a:srgbClr val="323232"/>
-                </a:solidFill>
-              </a:defRPr>
-            </a:pPr>
-            <a:r>
-              <a:t>Check network latency</a:t>
-            </a:r>
-          </a:p>
-          <a:p>
-            <a:pPr lvl="1">
-              <a:spcBef>
-                <a:spcPts val="600"/>
-              </a:spcBef>
-              <a:spcAft>
-                <a:spcPts val="600"/>
-              </a:spcAft>
-              <a:defRPr sz="1600">
-                <a:solidFill>
-                  <a:srgbClr val="323232"/>
-                </a:solidFill>
-              </a:defRPr>
-            </a:pPr>
-            <a:r>
-              <a:t>Verify LLM response time isn't too long</a:t>
-            </a:r>
-          </a:p>
-          <a:p>
-            <a:pPr lvl="1">
-              <a:spcBef>
-                <a:spcPts val="600"/>
-              </a:spcBef>
-              <a:spcAft>
-                <a:spcPts val="600"/>
-              </a:spcAft>
-              <a:defRPr sz="1600">
-                <a:solidFill>
-                  <a:srgbClr val="323232"/>
-                </a:solidFill>
-              </a:defRPr>
-            </a:pPr>
-            <a:r>
-              <a:t>Adjust Whisper no_speech_prob</a:t>
-            </a:r>
-          </a:p>
-          <a:p>
-            <a:pPr>
-              <a:spcBef>
-                <a:spcPts val="600"/>
-              </a:spcBef>
-              <a:spcAft>
-                <a:spcPts val="600"/>
-              </a:spcAft>
-              <a:defRPr sz="1800">
-                <a:solidFill>
-                  <a:srgbClr val="323232"/>
-                </a:solidFill>
-              </a:defRPr>
-            </a:pPr>
-          </a:p>
-          <a:p>
-            <a:pPr>
-              <a:spcBef>
-                <a:spcPts val="600"/>
-              </a:spcBef>
-              <a:spcAft>
-                <a:spcPts val="600"/>
-              </a:spcAft>
-              <a:defRPr sz="1800">
-                <a:solidFill>
-                  <a:srgbClr val="323232"/>
-                </a:solidFill>
-              </a:defRPr>
-            </a:pPr>
-            <a:r>
-              <a:t>No Response:</a:t>
-            </a:r>
-          </a:p>
-          <a:p>
-            <a:pPr lvl="1">
-              <a:spcBef>
-                <a:spcPts val="600"/>
-              </a:spcBef>
-              <a:spcAft>
-                <a:spcPts val="600"/>
-              </a:spcAft>
-              <a:defRPr sz="1600">
-                <a:solidFill>
-                  <a:srgbClr val="323232"/>
-                </a:solidFill>
-              </a:defRPr>
-            </a:pPr>
-            <a:r>
-              <a:t>Verify LLM model is loaded correctly</a:t>
-            </a:r>
-          </a:p>
-          <a:p>
-            <a:pPr lvl="1">
-              <a:spcBef>
-                <a:spcPts val="600"/>
-              </a:spcBef>
-              <a:spcAft>
-                <a:spcPts val="600"/>
-              </a:spcAft>
-              <a:defRPr sz="1600">
-                <a:solidFill>
-                  <a:srgbClr val="323232"/>
-                </a:solidFill>
-              </a:defRPr>
-            </a:pPr>
-            <a:r>
-              <a:t>Verify Monkey-Patch is applied</a:t>
+              <a:t>Server Side:</a:t>
+            </a:r>
+          </a:p>
+          <a:p>
+            <a:pPr lvl="1">
+              <a:spcBef>
+                <a:spcPts val="600"/>
+              </a:spcBef>
+              <a:spcAft>
+                <a:spcPts val="600"/>
+              </a:spcAft>
+              <a:defRPr sz="1600">
+                <a:solidFill>
+                  <a:srgbClr val="323232"/>
+                </a:solidFill>
+              </a:defRPr>
+            </a:pPr>
+            <a:r>
+              <a:t>WebSocket disconnect → cleanup in finally block</a:t>
+            </a:r>
+          </a:p>
+          <a:p>
+            <a:pPr lvl="1">
+              <a:spcBef>
+                <a:spcPts val="600"/>
+              </a:spcBef>
+              <a:spcAft>
+                <a:spcPts val="600"/>
+              </a:spcAft>
+              <a:defRPr sz="1600">
+                <a:solidFill>
+                  <a:srgbClr val="323232"/>
+                </a:solidFill>
+              </a:defRPr>
+            </a:pPr>
+            <a:r>
+              <a:t>Model load failure → log and continue (runtime error)</a:t>
+            </a:r>
+          </a:p>
+          <a:p>
+            <a:pPr lvl="1">
+              <a:spcBef>
+                <a:spcPts val="600"/>
+              </a:spcBef>
+              <a:spcAft>
+                <a:spcPts val="600"/>
+              </a:spcAft>
+              <a:defRPr sz="1600">
+                <a:solidFill>
+                  <a:srgbClr val="323232"/>
+                </a:solidFill>
+              </a:defRPr>
+            </a:pPr>
+            <a:r>
+              <a:t>Connector stop failure → warning log only</a:t>
+            </a:r>
+          </a:p>
+          <a:p>
+            <a:pPr>
+              <a:spcBef>
+                <a:spcPts val="600"/>
+              </a:spcBef>
+              <a:spcAft>
+                <a:spcPts val="600"/>
+              </a:spcAft>
+              <a:defRPr sz="1800">
+                <a:solidFill>
+                  <a:srgbClr val="323232"/>
+                </a:solidFill>
+              </a:defRPr>
+            </a:pPr>
+          </a:p>
+          <a:p>
+            <a:pPr>
+              <a:spcBef>
+                <a:spcPts val="600"/>
+              </a:spcBef>
+              <a:spcAft>
+                <a:spcPts val="600"/>
+              </a:spcAft>
+              <a:defRPr sz="1800">
+                <a:solidFill>
+                  <a:srgbClr val="323232"/>
+                </a:solidFill>
+              </a:defRPr>
+            </a:pPr>
+            <a:r>
+              <a:t>Pipeline Side:</a:t>
+            </a:r>
+          </a:p>
+          <a:p>
+            <a:pPr lvl="1">
+              <a:spcBef>
+                <a:spcPts val="600"/>
+              </a:spcBef>
+              <a:spcAft>
+                <a:spcPts val="600"/>
+              </a:spcAft>
+              <a:defRPr sz="1600">
+                <a:solidFill>
+                  <a:srgbClr val="323232"/>
+                </a:solidFill>
+              </a:defRPr>
+            </a:pPr>
+            <a:r>
+              <a:t>STT timeout → cancel _ttfb_timeout_task</a:t>
+            </a:r>
+          </a:p>
+          <a:p>
+            <a:pPr lvl="1">
+              <a:spcBef>
+                <a:spcPts val="600"/>
+              </a:spcBef>
+              <a:spcAft>
+                <a:spcPts val="600"/>
+              </a:spcAft>
+              <a:defRPr sz="1600">
+                <a:solidFill>
+                  <a:srgbClr val="323232"/>
+                </a:solidFill>
+              </a:defRPr>
+            </a:pPr>
+            <a:r>
+              <a:t>LLM error → exception log → end session</a:t>
+            </a:r>
+          </a:p>
+          <a:p>
+            <a:pPr>
+              <a:spcBef>
+                <a:spcPts val="600"/>
+              </a:spcBef>
+              <a:spcAft>
+                <a:spcPts val="600"/>
+              </a:spcAft>
+              <a:defRPr sz="1800">
+                <a:solidFill>
+                  <a:srgbClr val="323232"/>
+                </a:solidFill>
+              </a:defRPr>
+            </a:pPr>
+          </a:p>
+          <a:p>
+            <a:pPr>
+              <a:spcBef>
+                <a:spcPts val="600"/>
+              </a:spcBef>
+              <a:spcAft>
+                <a:spcPts val="600"/>
+              </a:spcAft>
+              <a:defRPr sz="1800">
+                <a:solidFill>
+                  <a:srgbClr val="323232"/>
+                </a:solidFill>
+              </a:defRPr>
+            </a:pPr>
+            <a:r>
+              <a:t>Browser Side:</a:t>
+            </a:r>
+          </a:p>
+          <a:p>
+            <a:pPr lvl="1">
+              <a:spcBef>
+                <a:spcPts val="600"/>
+              </a:spcBef>
+              <a:spcAft>
+                <a:spcPts val="600"/>
+              </a:spcAft>
+              <a:defRPr sz="1600">
+                <a:solidFill>
+                  <a:srgbClr val="323232"/>
+                </a:solidFill>
+              </a:defRPr>
+            </a:pPr>
+            <a:r>
+              <a:t>Connection failure → show status</a:t>
+            </a:r>
+          </a:p>
+          <a:p>
+            <a:pPr lvl="1">
+              <a:spcBef>
+                <a:spcPts val="600"/>
+              </a:spcBef>
+              <a:spcAft>
+                <a:spcPts val="600"/>
+              </a:spcAft>
+              <a:defRPr sz="1600">
+                <a:solidFill>
+                  <a:srgbClr val="323232"/>
+                </a:solidFill>
+              </a:defRPr>
+            </a:pPr>
+            <a:r>
+              <a:t>Stream receive failure → log only (continue UI)</a:t>
             </a:r>
           </a:p>
         </p:txBody>
@@ -6301,6 +5942,903 @@
               </a:defRPr>
             </a:pPr>
             <a:r>
+              <a:t>Performance &amp; Optimization</a:t>
+            </a:r>
+          </a:p>
+        </p:txBody>
+      </p:sp>
+      <p:sp>
+        <p:nvSpPr>
+          <p:cNvPr id="3" name="TextBox 2"/>
+          <p:cNvSpPr txBox="1"/>
+          <p:nvPr/>
+        </p:nvSpPr>
+        <p:spPr>
+          <a:xfrm>
+            <a:off x="640080" y="1280160"/>
+            <a:ext cx="7863840" cy="5029200"/>
+          </a:xfrm>
+          <a:prstGeom prst="rect">
+            <a:avLst/>
+          </a:prstGeom>
+          <a:noFill/>
+        </p:spPr>
+        <p:txBody>
+          <a:bodyPr wrap="square">
+            <a:spAutoFit/>
+          </a:bodyPr>
+          <a:lstStyle/>
+          <a:p>
+            <a:pPr>
+              <a:spcBef>
+                <a:spcPts val="600"/>
+              </a:spcBef>
+              <a:spcAft>
+                <a:spcPts val="600"/>
+              </a:spcAft>
+              <a:defRPr sz="1800">
+                <a:solidFill>
+                  <a:srgbClr val="323232"/>
+                </a:solidFill>
+              </a:defRPr>
+            </a:pPr>
+            <a:r>
+              <a:t>Model Pre-loading:</a:t>
+            </a:r>
+          </a:p>
+          <a:p>
+            <a:pPr lvl="1">
+              <a:spcBef>
+                <a:spcPts val="600"/>
+              </a:spcBef>
+              <a:spcAft>
+                <a:spcPts val="600"/>
+              </a:spcAft>
+              <a:defRPr sz="1600">
+                <a:solidFill>
+                  <a:srgbClr val="323232"/>
+                </a:solidFill>
+              </a:defRPr>
+            </a:pPr>
+            <a:r>
+              <a:t>preload_models() on startup loads all models to memory</a:t>
+            </a:r>
+          </a:p>
+          <a:p>
+            <a:pPr lvl="1">
+              <a:spcBef>
+                <a:spcPts val="600"/>
+              </a:spcBef>
+              <a:spcAft>
+                <a:spcPts val="600"/>
+              </a:spcAft>
+              <a:defRPr sz="1600">
+                <a:solidFill>
+                  <a:srgbClr val="323232"/>
+                </a:solidFill>
+              </a:defRPr>
+            </a:pPr>
+            <a:r>
+              <a:t>Eliminates first-connection delay</a:t>
+            </a:r>
+          </a:p>
+          <a:p>
+            <a:pPr>
+              <a:spcBef>
+                <a:spcPts val="600"/>
+              </a:spcBef>
+              <a:spcAft>
+                <a:spcPts val="600"/>
+              </a:spcAft>
+              <a:defRPr sz="1800">
+                <a:solidFill>
+                  <a:srgbClr val="323232"/>
+                </a:solidFill>
+              </a:defRPr>
+            </a:pPr>
+          </a:p>
+          <a:p>
+            <a:pPr>
+              <a:spcBef>
+                <a:spcPts val="600"/>
+              </a:spcBef>
+              <a:spcAft>
+                <a:spcPts val="600"/>
+              </a:spcAft>
+              <a:defRPr sz="1800">
+                <a:solidFill>
+                  <a:srgbClr val="323232"/>
+                </a:solidFill>
+              </a:defRPr>
+            </a:pPr>
+            <a:r>
+              <a:t>Whisper MLX:</a:t>
+            </a:r>
+          </a:p>
+          <a:p>
+            <a:pPr lvl="1">
+              <a:spcBef>
+                <a:spcPts val="600"/>
+              </a:spcBef>
+              <a:spcAft>
+                <a:spcPts val="600"/>
+              </a:spcAft>
+              <a:defRPr sz="1600">
+                <a:solidFill>
+                  <a:srgbClr val="323232"/>
+                </a:solidFill>
+              </a:defRPr>
+            </a:pPr>
+            <a:r>
+              <a:t>LARGE_V3_TURBO_Q4: Fast, high-accuracy (recommended)</a:t>
+            </a:r>
+          </a:p>
+          <a:p>
+            <a:pPr>
+              <a:spcBef>
+                <a:spcPts val="600"/>
+              </a:spcBef>
+              <a:spcAft>
+                <a:spcPts val="600"/>
+              </a:spcAft>
+              <a:defRPr sz="1800">
+                <a:solidFill>
+                  <a:srgbClr val="323232"/>
+                </a:solidFill>
+              </a:defRPr>
+            </a:pPr>
+          </a:p>
+          <a:p>
+            <a:pPr>
+              <a:spcBef>
+                <a:spcPts val="600"/>
+              </a:spcBef>
+              <a:spcAft>
+                <a:spcPts val="600"/>
+              </a:spcAft>
+              <a:defRPr sz="1800">
+                <a:solidFill>
+                  <a:srgbClr val="323232"/>
+                </a:solidFill>
+              </a:defRPr>
+            </a:pPr>
+            <a:r>
+              <a:t>Async Processing:</a:t>
+            </a:r>
+          </a:p>
+          <a:p>
+            <a:pPr lvl="1">
+              <a:spcBef>
+                <a:spcPts val="600"/>
+              </a:spcBef>
+              <a:spcAft>
+                <a:spcPts val="600"/>
+              </a:spcAft>
+              <a:defRPr sz="1600">
+                <a:solidFill>
+                  <a:srgbClr val="323232"/>
+                </a:solidFill>
+              </a:defRPr>
+            </a:pPr>
+            <a:r>
+              <a:t>asyncio avoids I/O blocking</a:t>
+            </a:r>
+          </a:p>
+          <a:p>
+            <a:pPr lvl="1">
+              <a:spcBef>
+                <a:spcPts val="600"/>
+              </a:spcBef>
+              <a:spcAft>
+                <a:spcPts val="600"/>
+              </a:spcAft>
+              <a:defRPr sz="1600">
+                <a:solidFill>
+                  <a:srgbClr val="323232"/>
+                </a:solidFill>
+              </a:defRPr>
+            </a:pPr>
+            <a:r>
+              <a:t>Parallel processing achieves low-latency</a:t>
+            </a:r>
+          </a:p>
+          <a:p>
+            <a:pPr>
+              <a:spcBef>
+                <a:spcPts val="600"/>
+              </a:spcBef>
+              <a:spcAft>
+                <a:spcPts val="600"/>
+              </a:spcAft>
+              <a:defRPr sz="1800">
+                <a:solidFill>
+                  <a:srgbClr val="323232"/>
+                </a:solidFill>
+              </a:defRPr>
+            </a:pPr>
+          </a:p>
+          <a:p>
+            <a:pPr>
+              <a:spcBef>
+                <a:spcPts val="600"/>
+              </a:spcBef>
+              <a:spcAft>
+                <a:spcPts val="600"/>
+              </a:spcAft>
+              <a:defRPr sz="1800">
+                <a:solidFill>
+                  <a:srgbClr val="323232"/>
+                </a:solidFill>
+              </a:defRPr>
+            </a:pPr>
+            <a:r>
+              <a:t>Greeting Strategy:</a:t>
+            </a:r>
+          </a:p>
+          <a:p>
+            <a:pPr lvl="1">
+              <a:spcBef>
+                <a:spcPts val="600"/>
+              </a:spcBef>
+              <a:spcAft>
+                <a:spcPts val="600"/>
+              </a:spcAft>
+              <a:defRPr sz="1600">
+                <a:solidFill>
+                  <a:srgbClr val="323232"/>
+                </a:solidFill>
+              </a:defRPr>
+            </a:pPr>
+            <a:r>
+              <a:t>Immediate + Delayed to handle network latency</a:t>
+            </a:r>
+          </a:p>
+        </p:txBody>
+      </p:sp>
+    </p:spTree>
+  </p:cSld>
+  <p:clrMapOvr>
+    <a:masterClrMapping/>
+  </p:clrMapOvr>
+</p:sld>
+</file>
+
+<file path=ppt/slides/slide21.xml><?xml version="1.0" encoding="utf-8"?>
+<p:sld xmlns:a="http://schemas.openxmlformats.org/drawingml/2006/main" xmlns:p="http://schemas.openxmlformats.org/presentationml/2006/main" xmlns:r="http://schemas.openxmlformats.org/officeDocument/2006/relationships">
+  <p:cSld>
+    <p:bg>
+      <p:bgPr>
+        <a:solidFill>
+          <a:srgbClr val="F5F5F5"/>
+        </a:solidFill>
+        <a:effectLst/>
+      </p:bgPr>
+    </p:bg>
+    <p:spTree>
+      <p:nvGrpSpPr>
+        <p:cNvPr id="1" name=""/>
+        <p:cNvGrpSpPr/>
+        <p:nvPr/>
+      </p:nvGrpSpPr>
+      <p:grpSpPr/>
+      <p:sp>
+        <p:nvSpPr>
+          <p:cNvPr id="2" name="TextBox 1"/>
+          <p:cNvSpPr txBox="1"/>
+          <p:nvPr/>
+        </p:nvSpPr>
+        <p:spPr>
+          <a:xfrm>
+            <a:off x="457200" y="365760"/>
+            <a:ext cx="8229600" cy="731520"/>
+          </a:xfrm>
+          <a:prstGeom prst="rect">
+            <a:avLst/>
+          </a:prstGeom>
+          <a:noFill/>
+        </p:spPr>
+        <p:txBody>
+          <a:bodyPr wrap="none">
+            <a:spAutoFit/>
+          </a:bodyPr>
+          <a:lstStyle/>
+          <a:p>
+            <a:pPr>
+              <a:defRPr sz="4000" b="1">
+                <a:solidFill>
+                  <a:srgbClr val="1976D2"/>
+                </a:solidFill>
+              </a:defRPr>
+            </a:pPr>
+            <a:r>
+              <a:t>Security Considerations</a:t>
+            </a:r>
+          </a:p>
+        </p:txBody>
+      </p:sp>
+      <p:sp>
+        <p:nvSpPr>
+          <p:cNvPr id="3" name="TextBox 2"/>
+          <p:cNvSpPr txBox="1"/>
+          <p:nvPr/>
+        </p:nvSpPr>
+        <p:spPr>
+          <a:xfrm>
+            <a:off x="640080" y="1280160"/>
+            <a:ext cx="7863840" cy="5029200"/>
+          </a:xfrm>
+          <a:prstGeom prst="rect">
+            <a:avLst/>
+          </a:prstGeom>
+          <a:noFill/>
+        </p:spPr>
+        <p:txBody>
+          <a:bodyPr wrap="square">
+            <a:spAutoFit/>
+          </a:bodyPr>
+          <a:lstStyle/>
+          <a:p>
+            <a:pPr>
+              <a:spcBef>
+                <a:spcPts val="600"/>
+              </a:spcBef>
+              <a:spcAft>
+                <a:spcPts val="600"/>
+              </a:spcAft>
+              <a:defRPr sz="1800">
+                <a:solidFill>
+                  <a:srgbClr val="323232"/>
+                </a:solidFill>
+              </a:defRPr>
+            </a:pPr>
+            <a:r>
+              <a:t>Privacy:</a:t>
+            </a:r>
+          </a:p>
+          <a:p>
+            <a:pPr lvl="1">
+              <a:spcBef>
+                <a:spcPts val="600"/>
+              </a:spcBef>
+              <a:spcAft>
+                <a:spcPts val="600"/>
+              </a:spcAft>
+              <a:defRPr sz="1600">
+                <a:solidFill>
+                  <a:srgbClr val="323232"/>
+                </a:solidFill>
+              </a:defRPr>
+            </a:pPr>
+            <a:r>
+              <a:t>All processing runs locally → no data sent externally</a:t>
+            </a:r>
+          </a:p>
+          <a:p>
+            <a:pPr lvl="1">
+              <a:spcBef>
+                <a:spcPts val="600"/>
+              </a:spcBef>
+              <a:spcAft>
+                <a:spcPts val="600"/>
+              </a:spcAft>
+              <a:defRPr sz="1600">
+                <a:solidFill>
+                  <a:srgbClr val="323232"/>
+                </a:solidFill>
+              </a:defRPr>
+            </a:pPr>
+            <a:r>
+              <a:t>LLM/STT/TTS run in LM Studio</a:t>
+            </a:r>
+          </a:p>
+          <a:p>
+            <a:pPr>
+              <a:spcBef>
+                <a:spcPts val="600"/>
+              </a:spcBef>
+              <a:spcAft>
+                <a:spcPts val="600"/>
+              </a:spcAft>
+              <a:defRPr sz="1800">
+                <a:solidFill>
+                  <a:srgbClr val="323232"/>
+                </a:solidFill>
+              </a:defRPr>
+            </a:pPr>
+          </a:p>
+          <a:p>
+            <a:pPr>
+              <a:spcBef>
+                <a:spcPts val="600"/>
+              </a:spcBef>
+              <a:spcAft>
+                <a:spcPts val="600"/>
+              </a:spcAft>
+              <a:defRPr sz="1800">
+                <a:solidFill>
+                  <a:srgbClr val="323232"/>
+                </a:solidFill>
+              </a:defRPr>
+            </a:pPr>
+            <a:r>
+              <a:t>Authentication &amp; Authorization:</a:t>
+            </a:r>
+          </a:p>
+          <a:p>
+            <a:pPr lvl="1">
+              <a:spcBef>
+                <a:spcPts val="600"/>
+              </a:spcBef>
+              <a:spcAft>
+                <a:spcPts val="600"/>
+              </a:spcAft>
+              <a:defRPr sz="1600">
+                <a:solidFill>
+                  <a:srgbClr val="323232"/>
+                </a:solidFill>
+              </a:defRPr>
+            </a:pPr>
+            <a:r>
+              <a:t>Vonage API secured by SDK (private key management)</a:t>
+            </a:r>
+          </a:p>
+          <a:p>
+            <a:pPr lvl="1">
+              <a:spcBef>
+                <a:spcPts val="600"/>
+              </a:spcBef>
+              <a:spcAft>
+                <a:spcPts val="600"/>
+              </a:spcAft>
+              <a:defRPr sz="1600">
+                <a:solidFill>
+                  <a:srgbClr val="323232"/>
+                </a:solidFill>
+              </a:defRPr>
+            </a:pPr>
+            <a:r>
+              <a:t>Secrets managed in environment variables (.env)</a:t>
+            </a:r>
+          </a:p>
+          <a:p>
+            <a:pPr>
+              <a:spcBef>
+                <a:spcPts val="600"/>
+              </a:spcBef>
+              <a:spcAft>
+                <a:spcPts val="600"/>
+              </a:spcAft>
+              <a:defRPr sz="1800">
+                <a:solidFill>
+                  <a:srgbClr val="323232"/>
+                </a:solidFill>
+              </a:defRPr>
+            </a:pPr>
+          </a:p>
+          <a:p>
+            <a:pPr>
+              <a:spcBef>
+                <a:spcPts val="600"/>
+              </a:spcBef>
+              <a:spcAft>
+                <a:spcPts val="600"/>
+              </a:spcAft>
+              <a:defRPr sz="1800">
+                <a:solidFill>
+                  <a:srgbClr val="323232"/>
+                </a:solidFill>
+              </a:defRPr>
+            </a:pPr>
+            <a:r>
+              <a:t>Communication:</a:t>
+            </a:r>
+          </a:p>
+          <a:p>
+            <a:pPr lvl="1">
+              <a:spcBef>
+                <a:spcPts val="600"/>
+              </a:spcBef>
+              <a:spcAft>
+                <a:spcPts val="600"/>
+              </a:spcAft>
+              <a:defRPr sz="1600">
+                <a:solidFill>
+                  <a:srgbClr val="323232"/>
+                </a:solidFill>
+              </a:defRPr>
+            </a:pPr>
+            <a:r>
+              <a:t>Tunnel URL encrypted with HTTPS/WSS</a:t>
+            </a:r>
+          </a:p>
+          <a:p>
+            <a:pPr lvl="1">
+              <a:spcBef>
+                <a:spcPts val="600"/>
+              </a:spcBef>
+              <a:spcAft>
+                <a:spcPts val="600"/>
+              </a:spcAft>
+              <a:defRPr sz="1600">
+                <a:solidFill>
+                  <a:srgbClr val="323232"/>
+                </a:solidFill>
+              </a:defRPr>
+            </a:pPr>
+            <a:r>
+              <a:t>WebSocket uses binary protocol for efficiency</a:t>
+            </a:r>
+          </a:p>
+        </p:txBody>
+      </p:sp>
+    </p:spTree>
+  </p:cSld>
+  <p:clrMapOvr>
+    <a:masterClrMapping/>
+  </p:clrMapOvr>
+</p:sld>
+</file>
+
+<file path=ppt/slides/slide22.xml><?xml version="1.0" encoding="utf-8"?>
+<p:sld xmlns:a="http://schemas.openxmlformats.org/drawingml/2006/main" xmlns:p="http://schemas.openxmlformats.org/presentationml/2006/main" xmlns:r="http://schemas.openxmlformats.org/officeDocument/2006/relationships">
+  <p:cSld>
+    <p:bg>
+      <p:bgPr>
+        <a:solidFill>
+          <a:srgbClr val="F5F5F5"/>
+        </a:solidFill>
+        <a:effectLst/>
+      </p:bgPr>
+    </p:bg>
+    <p:spTree>
+      <p:nvGrpSpPr>
+        <p:cNvPr id="1" name=""/>
+        <p:cNvGrpSpPr/>
+        <p:nvPr/>
+      </p:nvGrpSpPr>
+      <p:grpSpPr/>
+      <p:sp>
+        <p:nvSpPr>
+          <p:cNvPr id="2" name="TextBox 1"/>
+          <p:cNvSpPr txBox="1"/>
+          <p:nvPr/>
+        </p:nvSpPr>
+        <p:spPr>
+          <a:xfrm>
+            <a:off x="457200" y="365760"/>
+            <a:ext cx="8229600" cy="731520"/>
+          </a:xfrm>
+          <a:prstGeom prst="rect">
+            <a:avLst/>
+          </a:prstGeom>
+          <a:noFill/>
+        </p:spPr>
+        <p:txBody>
+          <a:bodyPr wrap="none">
+            <a:spAutoFit/>
+          </a:bodyPr>
+          <a:lstStyle/>
+          <a:p>
+            <a:pPr>
+              <a:defRPr sz="4000" b="1">
+                <a:solidFill>
+                  <a:srgbClr val="1976D2"/>
+                </a:solidFill>
+              </a:defRPr>
+            </a:pPr>
+            <a:r>
+              <a:t>Troubleshooting</a:t>
+            </a:r>
+          </a:p>
+        </p:txBody>
+      </p:sp>
+      <p:sp>
+        <p:nvSpPr>
+          <p:cNvPr id="3" name="TextBox 2"/>
+          <p:cNvSpPr txBox="1"/>
+          <p:nvPr/>
+        </p:nvSpPr>
+        <p:spPr>
+          <a:xfrm>
+            <a:off x="640080" y="1280160"/>
+            <a:ext cx="7863840" cy="5029200"/>
+          </a:xfrm>
+          <a:prstGeom prst="rect">
+            <a:avLst/>
+          </a:prstGeom>
+          <a:noFill/>
+        </p:spPr>
+        <p:txBody>
+          <a:bodyPr wrap="square">
+            <a:spAutoFit/>
+          </a:bodyPr>
+          <a:lstStyle/>
+          <a:p>
+            <a:pPr>
+              <a:spcBef>
+                <a:spcPts val="600"/>
+              </a:spcBef>
+              <a:spcAft>
+                <a:spcPts val="600"/>
+              </a:spcAft>
+              <a:defRPr sz="1800">
+                <a:solidFill>
+                  <a:srgbClr val="323232"/>
+                </a:solidFill>
+              </a:defRPr>
+            </a:pPr>
+            <a:r>
+              <a:t>Cannot Connect:</a:t>
+            </a:r>
+          </a:p>
+          <a:p>
+            <a:pPr lvl="1">
+              <a:spcBef>
+                <a:spcPts val="600"/>
+              </a:spcBef>
+              <a:spcAft>
+                <a:spcPts val="600"/>
+              </a:spcAft>
+              <a:defRPr sz="1600">
+                <a:solidFill>
+                  <a:srgbClr val="323232"/>
+                </a:solidFill>
+              </a:defRPr>
+            </a:pPr>
+            <a:r>
+              <a:t>Verify LM Studio is running</a:t>
+            </a:r>
+          </a:p>
+          <a:p>
+            <a:pPr lvl="1">
+              <a:spcBef>
+                <a:spcPts val="600"/>
+              </a:spcBef>
+              <a:spcAft>
+                <a:spcPts val="600"/>
+              </a:spcAft>
+              <a:defRPr sz="1600">
+                <a:solidFill>
+                  <a:srgbClr val="323232"/>
+                </a:solidFill>
+              </a:defRPr>
+            </a:pPr>
+            <a:r>
+              <a:t>Check Tunnel URL is correct (WS_URI)</a:t>
+            </a:r>
+          </a:p>
+          <a:p>
+            <a:pPr lvl="1">
+              <a:spcBef>
+                <a:spcPts val="600"/>
+              </a:spcBef>
+              <a:spcAft>
+                <a:spcPts val="600"/>
+              </a:spcAft>
+              <a:defRPr sz="1600">
+                <a:solidFill>
+                  <a:srgbClr val="323232"/>
+                </a:solidFill>
+              </a:defRPr>
+            </a:pPr>
+            <a:r>
+              <a:t>Verify Vonage credentials are correct</a:t>
+            </a:r>
+          </a:p>
+          <a:p>
+            <a:pPr>
+              <a:spcBef>
+                <a:spcPts val="600"/>
+              </a:spcBef>
+              <a:spcAft>
+                <a:spcPts val="600"/>
+              </a:spcAft>
+              <a:defRPr sz="1800">
+                <a:solidFill>
+                  <a:srgbClr val="323232"/>
+                </a:solidFill>
+              </a:defRPr>
+            </a:pPr>
+          </a:p>
+          <a:p>
+            <a:pPr>
+              <a:spcBef>
+                <a:spcPts val="600"/>
+              </a:spcBef>
+              <a:spcAft>
+                <a:spcPts val="600"/>
+              </a:spcAft>
+              <a:defRPr sz="1800">
+                <a:solidFill>
+                  <a:srgbClr val="323232"/>
+                </a:solidFill>
+              </a:defRPr>
+            </a:pPr>
+            <a:r>
+              <a:t>Audio Cuts Out:</a:t>
+            </a:r>
+          </a:p>
+          <a:p>
+            <a:pPr lvl="1">
+              <a:spcBef>
+                <a:spcPts val="600"/>
+              </a:spcBef>
+              <a:spcAft>
+                <a:spcPts val="600"/>
+              </a:spcAft>
+              <a:defRPr sz="1600">
+                <a:solidFill>
+                  <a:srgbClr val="323232"/>
+                </a:solidFill>
+              </a:defRPr>
+            </a:pPr>
+            <a:r>
+              <a:t>Check network latency</a:t>
+            </a:r>
+          </a:p>
+          <a:p>
+            <a:pPr lvl="1">
+              <a:spcBef>
+                <a:spcPts val="600"/>
+              </a:spcBef>
+              <a:spcAft>
+                <a:spcPts val="600"/>
+              </a:spcAft>
+              <a:defRPr sz="1600">
+                <a:solidFill>
+                  <a:srgbClr val="323232"/>
+                </a:solidFill>
+              </a:defRPr>
+            </a:pPr>
+            <a:r>
+              <a:t>Verify LLM response time isn't too long</a:t>
+            </a:r>
+          </a:p>
+          <a:p>
+            <a:pPr lvl="1">
+              <a:spcBef>
+                <a:spcPts val="600"/>
+              </a:spcBef>
+              <a:spcAft>
+                <a:spcPts val="600"/>
+              </a:spcAft>
+              <a:defRPr sz="1600">
+                <a:solidFill>
+                  <a:srgbClr val="323232"/>
+                </a:solidFill>
+              </a:defRPr>
+            </a:pPr>
+            <a:r>
+              <a:t>Adjust Whisper no_speech_prob</a:t>
+            </a:r>
+          </a:p>
+          <a:p>
+            <a:pPr>
+              <a:spcBef>
+                <a:spcPts val="600"/>
+              </a:spcBef>
+              <a:spcAft>
+                <a:spcPts val="600"/>
+              </a:spcAft>
+              <a:defRPr sz="1800">
+                <a:solidFill>
+                  <a:srgbClr val="323232"/>
+                </a:solidFill>
+              </a:defRPr>
+            </a:pPr>
+          </a:p>
+          <a:p>
+            <a:pPr>
+              <a:spcBef>
+                <a:spcPts val="600"/>
+              </a:spcBef>
+              <a:spcAft>
+                <a:spcPts val="600"/>
+              </a:spcAft>
+              <a:defRPr sz="1800">
+                <a:solidFill>
+                  <a:srgbClr val="323232"/>
+                </a:solidFill>
+              </a:defRPr>
+            </a:pPr>
+            <a:r>
+              <a:t>No Response:</a:t>
+            </a:r>
+          </a:p>
+          <a:p>
+            <a:pPr lvl="1">
+              <a:spcBef>
+                <a:spcPts val="600"/>
+              </a:spcBef>
+              <a:spcAft>
+                <a:spcPts val="600"/>
+              </a:spcAft>
+              <a:defRPr sz="1600">
+                <a:solidFill>
+                  <a:srgbClr val="323232"/>
+                </a:solidFill>
+              </a:defRPr>
+            </a:pPr>
+            <a:r>
+              <a:t>Verify LLM model is loaded correctly</a:t>
+            </a:r>
+          </a:p>
+          <a:p>
+            <a:pPr lvl="1">
+              <a:spcBef>
+                <a:spcPts val="600"/>
+              </a:spcBef>
+              <a:spcAft>
+                <a:spcPts val="600"/>
+              </a:spcAft>
+              <a:defRPr sz="1600">
+                <a:solidFill>
+                  <a:srgbClr val="323232"/>
+                </a:solidFill>
+              </a:defRPr>
+            </a:pPr>
+            <a:r>
+              <a:t>Verify Monkey-Patch is applied</a:t>
+            </a:r>
+          </a:p>
+        </p:txBody>
+      </p:sp>
+    </p:spTree>
+  </p:cSld>
+  <p:clrMapOvr>
+    <a:masterClrMapping/>
+  </p:clrMapOvr>
+</p:sld>
+</file>
+
+<file path=ppt/slides/slide23.xml><?xml version="1.0" encoding="utf-8"?>
+<p:sld xmlns:a="http://schemas.openxmlformats.org/drawingml/2006/main" xmlns:p="http://schemas.openxmlformats.org/presentationml/2006/main" xmlns:r="http://schemas.openxmlformats.org/officeDocument/2006/relationships">
+  <p:cSld>
+    <p:bg>
+      <p:bgPr>
+        <a:solidFill>
+          <a:srgbClr val="F5F5F5"/>
+        </a:solidFill>
+        <a:effectLst/>
+      </p:bgPr>
+    </p:bg>
+    <p:spTree>
+      <p:nvGrpSpPr>
+        <p:cNvPr id="1" name=""/>
+        <p:cNvGrpSpPr/>
+        <p:nvPr/>
+      </p:nvGrpSpPr>
+      <p:grpSpPr/>
+      <p:sp>
+        <p:nvSpPr>
+          <p:cNvPr id="2" name="TextBox 1"/>
+          <p:cNvSpPr txBox="1"/>
+          <p:nvPr/>
+        </p:nvSpPr>
+        <p:spPr>
+          <a:xfrm>
+            <a:off x="457200" y="365760"/>
+            <a:ext cx="8229600" cy="731520"/>
+          </a:xfrm>
+          <a:prstGeom prst="rect">
+            <a:avLst/>
+          </a:prstGeom>
+          <a:noFill/>
+        </p:spPr>
+        <p:txBody>
+          <a:bodyPr wrap="none">
+            <a:spAutoFit/>
+          </a:bodyPr>
+          <a:lstStyle/>
+          <a:p>
+            <a:pPr>
+              <a:defRPr sz="4000" b="1">
+                <a:solidFill>
+                  <a:srgbClr val="1976D2"/>
+                </a:solidFill>
+              </a:defRPr>
+            </a:pPr>
+            <a:r>
               <a:t>Summary</a:t>
             </a:r>
           </a:p>
@@ -6799,7 +7337,7 @@
     <p:bg>
       <p:bgPr>
         <a:solidFill>
-          <a:srgbClr val="F5F5F5"/>
+          <a:srgbClr val="FFFFFF"/>
         </a:solidFill>
         <a:effectLst/>
       </p:bgPr>
@@ -6819,8 +7357,8 @@
         </p:nvSpPr>
         <p:spPr>
           <a:xfrm>
-            <a:off x="457200" y="365760"/>
-            <a:ext cx="8229600" cy="731520"/>
+            <a:off x="365760" y="228600"/>
+            <a:ext cx="8412480" cy="640080"/>
           </a:xfrm>
           <a:prstGeom prst="rect">
             <a:avLst/>
@@ -6828,221 +7366,48 @@
           <a:noFill/>
         </p:spPr>
         <p:txBody>
-          <a:bodyPr wrap="none">
+          <a:bodyPr wrap="square">
             <a:spAutoFit/>
           </a:bodyPr>
           <a:lstStyle/>
           <a:p>
-            <a:pPr>
-              <a:defRPr sz="4000" b="1">
+            <a:pPr algn="ctr">
+              <a:defRPr sz="2800" b="1">
                 <a:solidFill>
                   <a:srgbClr val="1976D2"/>
                 </a:solidFill>
               </a:defRPr>
             </a:pPr>
             <a:r>
-              <a:t>server.py: FastAPI Server</a:t>
-            </a:r>
-          </a:p>
-        </p:txBody>
-      </p:sp>
-      <p:sp>
-        <p:nvSpPr>
-          <p:cNvPr id="3" name="TextBox 2"/>
-          <p:cNvSpPr txBox="1"/>
+              <a:t>Diagram: Full System Architecture</a:t>
+            </a:r>
+          </a:p>
+        </p:txBody>
+      </p:sp>
+      <p:pic>
+        <p:nvPicPr>
+          <p:cNvPr id="3" name="Picture 2" descr="system_architecture_en.png"/>
+          <p:cNvPicPr>
+            <a:picLocks noChangeAspect="1"/>
+          </p:cNvPicPr>
           <p:nvPr/>
-        </p:nvSpPr>
+        </p:nvPicPr>
+        <p:blipFill>
+          <a:blip r:embed="rId2"/>
+          <a:stretch>
+            <a:fillRect/>
+          </a:stretch>
+        </p:blipFill>
         <p:spPr>
           <a:xfrm>
-            <a:off x="640080" y="1280160"/>
-            <a:ext cx="7863840" cy="5029200"/>
+            <a:off x="2417021" y="1051560"/>
+            <a:ext cx="4309957" cy="5486400"/>
           </a:xfrm>
           <a:prstGeom prst="rect">
             <a:avLst/>
           </a:prstGeom>
-          <a:noFill/>
         </p:spPr>
-        <p:txBody>
-          <a:bodyPr wrap="square">
-            <a:spAutoFit/>
-          </a:bodyPr>
-          <a:lstStyle/>
-          <a:p>
-            <a:pPr>
-              <a:spcBef>
-                <a:spcPts val="600"/>
-              </a:spcBef>
-              <a:spcAft>
-                <a:spcPts val="600"/>
-              </a:spcAft>
-              <a:defRPr sz="1800">
-                <a:solidFill>
-                  <a:srgbClr val="323232"/>
-                </a:solidFill>
-              </a:defRPr>
-            </a:pPr>
-            <a:r>
-              <a:t>Responsibility: HTTP/WebSocket interface, Vonage integration</a:t>
-            </a:r>
-          </a:p>
-          <a:p>
-            <a:pPr>
-              <a:spcBef>
-                <a:spcPts val="600"/>
-              </a:spcBef>
-              <a:spcAft>
-                <a:spcPts val="600"/>
-              </a:spcAft>
-              <a:defRPr sz="1800">
-                <a:solidFill>
-                  <a:srgbClr val="323232"/>
-                </a:solidFill>
-              </a:defRPr>
-            </a:pPr>
-          </a:p>
-          <a:p>
-            <a:pPr>
-              <a:spcBef>
-                <a:spcPts val="600"/>
-              </a:spcBef>
-              <a:spcAft>
-                <a:spcPts val="600"/>
-              </a:spcAft>
-              <a:defRPr sz="1800">
-                <a:solidFill>
-                  <a:srgbClr val="323232"/>
-                </a:solidFill>
-              </a:defRPr>
-            </a:pPr>
-            <a:r>
-              <a:t>Main Endpoints:</a:t>
-            </a:r>
-          </a:p>
-          <a:p>
-            <a:pPr lvl="1">
-              <a:spcBef>
-                <a:spcPts val="600"/>
-              </a:spcBef>
-              <a:spcAft>
-                <a:spcPts val="600"/>
-              </a:spcAft>
-              <a:defRPr sz="1600">
-                <a:solidFill>
-                  <a:srgbClr val="323232"/>
-                </a:solidFill>
-              </a:defRPr>
-            </a:pPr>
-            <a:r>
-              <a:t>GET/POST /voice/webhook: Receive incoming calls (return NCCO)</a:t>
-            </a:r>
-          </a:p>
-          <a:p>
-            <a:pPr lvl="1">
-              <a:spcBef>
-                <a:spcPts val="600"/>
-              </a:spcBef>
-              <a:spcAft>
-                <a:spcPts val="600"/>
-              </a:spcAft>
-              <a:defRPr sz="1600">
-                <a:solidFill>
-                  <a:srgbClr val="323232"/>
-                </a:solidFill>
-              </a:defRPr>
-            </a:pPr>
-            <a:r>
-              <a:t>POST /demo/connect: Create video session</a:t>
-            </a:r>
-          </a:p>
-          <a:p>
-            <a:pPr lvl="1">
-              <a:spcBef>
-                <a:spcPts val="600"/>
-              </a:spcBef>
-              <a:spcAft>
-                <a:spcPts val="600"/>
-              </a:spcAft>
-              <a:defRPr sz="1600">
-                <a:solidFill>
-                  <a:srgbClr val="323232"/>
-                </a:solidFill>
-              </a:defRPr>
-            </a:pPr>
-            <a:r>
-              <a:t>POST /connect: General connection (Video API)</a:t>
-            </a:r>
-          </a:p>
-          <a:p>
-            <a:pPr lvl="1">
-              <a:spcBef>
-                <a:spcPts val="600"/>
-              </a:spcBef>
-              <a:spcAft>
-                <a:spcPts val="600"/>
-              </a:spcAft>
-              <a:defRPr sz="1600">
-                <a:solidFill>
-                  <a:srgbClr val="323232"/>
-                </a:solidFill>
-              </a:defRPr>
-            </a:pPr>
-            <a:r>
-              <a:t>GET /: Serve static HTML</a:t>
-            </a:r>
-          </a:p>
-          <a:p>
-            <a:pPr lvl="1">
-              <a:spcBef>
-                <a:spcPts val="600"/>
-              </a:spcBef>
-              <a:spcAft>
-                <a:spcPts val="600"/>
-              </a:spcAft>
-              <a:defRPr sz="1600">
-                <a:solidFill>
-                  <a:srgbClr val="323232"/>
-                </a:solidFill>
-              </a:defRPr>
-            </a:pPr>
-            <a:r>
-              <a:t>WebSocket /ws: Bidirectional audio streaming</a:t>
-            </a:r>
-          </a:p>
-          <a:p>
-            <a:pPr>
-              <a:spcBef>
-                <a:spcPts val="600"/>
-              </a:spcBef>
-              <a:spcAft>
-                <a:spcPts val="600"/>
-              </a:spcAft>
-              <a:defRPr sz="1800">
-                <a:solidFill>
-                  <a:srgbClr val="323232"/>
-                </a:solidFill>
-              </a:defRPr>
-            </a:pPr>
-          </a:p>
-          <a:p>
-            <a:pPr>
-              <a:spcBef>
-                <a:spcPts val="600"/>
-              </a:spcBef>
-              <a:spcAft>
-                <a:spcPts val="600"/>
-              </a:spcAft>
-              <a:defRPr sz="1800">
-                <a:solidFill>
-                  <a:srgbClr val="323232"/>
-                </a:solidFill>
-              </a:defRPr>
-            </a:pPr>
-            <a:r>
-              <a:t>Session Management: _active_connectors dict tracks multiple connections</a:t>
-            </a:r>
-          </a:p>
-        </p:txBody>
-      </p:sp>
+      </p:pic>
     </p:spTree>
   </p:cSld>
   <p:clrMapOvr>
@@ -7099,7 +7464,7 @@
               </a:defRPr>
             </a:pPr>
             <a:r>
-              <a:t>bot.py: Pipecat Pipeline</a:t>
+              <a:t>server.py: FastAPI Server</a:t>
             </a:r>
           </a:p>
         </p:txBody>
@@ -7140,163 +7505,163 @@
               </a:defRPr>
             </a:pPr>
             <a:r>
-              <a:t>Responsibility: Audio processing, STT/LLM/TTS integration, conversation management</a:t>
-            </a:r>
-          </a:p>
-          <a:p>
-            <a:pPr>
-              <a:spcBef>
-                <a:spcPts val="600"/>
-              </a:spcBef>
-              <a:spcAft>
-                <a:spcPts val="600"/>
-              </a:spcAft>
-              <a:defRPr sz="1800">
-                <a:solidFill>
-                  <a:srgbClr val="323232"/>
-                </a:solidFill>
-              </a:defRPr>
-            </a:pPr>
-          </a:p>
-          <a:p>
-            <a:pPr>
-              <a:spcBef>
-                <a:spcPts val="600"/>
-              </a:spcBef>
-              <a:spcAft>
-                <a:spcPts val="600"/>
-              </a:spcAft>
-              <a:defRPr sz="1800">
-                <a:solidFill>
-                  <a:srgbClr val="323232"/>
-                </a:solidFill>
-              </a:defRPr>
-            </a:pPr>
-            <a:r>
-              <a:t>Initialization (preload_models):</a:t>
-            </a:r>
-          </a:p>
-          <a:p>
-            <a:pPr lvl="1">
-              <a:spcBef>
-                <a:spcPts val="600"/>
-              </a:spcBef>
-              <a:spcAft>
-                <a:spcPts val="600"/>
-              </a:spcAft>
-              <a:defRPr sz="1600">
-                <a:solidFill>
-                  <a:srgbClr val="323232"/>
-                </a:solidFill>
-              </a:defRPr>
-            </a:pPr>
-            <a:r>
-              <a:t>OpenAILLMService (LM Studio)</a:t>
-            </a:r>
-          </a:p>
-          <a:p>
-            <a:pPr lvl="1">
-              <a:spcBef>
-                <a:spcPts val="600"/>
-              </a:spcBef>
-              <a:spcAft>
-                <a:spcPts val="600"/>
-              </a:spcAft>
-              <a:defRPr sz="1600">
-                <a:solidFill>
-                  <a:srgbClr val="323232"/>
-                </a:solidFill>
-              </a:defRPr>
-            </a:pPr>
-            <a:r>
-              <a:t>WhisperSTTServiceMLX (Whisper)</a:t>
-            </a:r>
-          </a:p>
-          <a:p>
-            <a:pPr lvl="1">
-              <a:spcBef>
-                <a:spcPts val="600"/>
-              </a:spcBef>
-              <a:spcAft>
-                <a:spcPts val="600"/>
-              </a:spcAft>
-              <a:defRPr sz="1600">
-                <a:solidFill>
-                  <a:srgbClr val="323232"/>
-                </a:solidFill>
-              </a:defRPr>
-            </a:pPr>
-            <a:r>
-              <a:t>PiperPlusTTSService (Japanese TTS)</a:t>
-            </a:r>
-          </a:p>
-          <a:p>
-            <a:pPr lvl="1">
-              <a:spcBef>
-                <a:spcPts val="600"/>
-              </a:spcBef>
-              <a:spcAft>
-                <a:spcPts val="600"/>
-              </a:spcAft>
-              <a:defRPr sz="1600">
-                <a:solidFill>
-                  <a:srgbClr val="323232"/>
-                </a:solidFill>
-              </a:defRPr>
-            </a:pPr>
-            <a:r>
-              <a:t>SileroVADAnalyzer (Voice activity detection)</a:t>
-            </a:r>
-          </a:p>
-          <a:p>
-            <a:pPr lvl="1">
-              <a:spcBef>
-                <a:spcPts val="600"/>
-              </a:spcBef>
-              <a:spcAft>
-                <a:spcPts val="600"/>
-              </a:spcAft>
-              <a:defRPr sz="1600">
-                <a:solidFill>
-                  <a:srgbClr val="323232"/>
-                </a:solidFill>
-              </a:defRPr>
-            </a:pPr>
-            <a:r>
-              <a:t>LocalSmartTurnAnalyzerV3 (Conversation turn detection)</a:t>
-            </a:r>
-          </a:p>
-          <a:p>
-            <a:pPr>
-              <a:spcBef>
-                <a:spcPts val="600"/>
-              </a:spcBef>
-              <a:spcAft>
-                <a:spcPts val="600"/>
-              </a:spcAft>
-              <a:defRPr sz="1800">
-                <a:solidFill>
-                  <a:srgbClr val="323232"/>
-                </a:solidFill>
-              </a:defRPr>
-            </a:pPr>
-          </a:p>
-          <a:p>
-            <a:pPr>
-              <a:spcBef>
-                <a:spcPts val="600"/>
-              </a:spcBef>
-              <a:spcAft>
-                <a:spcPts val="600"/>
-              </a:spcAft>
-              <a:defRPr sz="1800">
-                <a:solidFill>
-                  <a:srgbClr val="323232"/>
-                </a:solidFill>
-              </a:defRPr>
-            </a:pPr>
-            <a:r>
-              <a:t>Critical Fix: Monkey-Patch LLMAssistantAggregator to forward TextFrame downstream</a:t>
+              <a:t>Responsibility: HTTP/WebSocket interface, Vonage integration</a:t>
+            </a:r>
+          </a:p>
+          <a:p>
+            <a:pPr>
+              <a:spcBef>
+                <a:spcPts val="600"/>
+              </a:spcBef>
+              <a:spcAft>
+                <a:spcPts val="600"/>
+              </a:spcAft>
+              <a:defRPr sz="1800">
+                <a:solidFill>
+                  <a:srgbClr val="323232"/>
+                </a:solidFill>
+              </a:defRPr>
+            </a:pPr>
+          </a:p>
+          <a:p>
+            <a:pPr>
+              <a:spcBef>
+                <a:spcPts val="600"/>
+              </a:spcBef>
+              <a:spcAft>
+                <a:spcPts val="600"/>
+              </a:spcAft>
+              <a:defRPr sz="1800">
+                <a:solidFill>
+                  <a:srgbClr val="323232"/>
+                </a:solidFill>
+              </a:defRPr>
+            </a:pPr>
+            <a:r>
+              <a:t>Main Endpoints:</a:t>
+            </a:r>
+          </a:p>
+          <a:p>
+            <a:pPr lvl="1">
+              <a:spcBef>
+                <a:spcPts val="600"/>
+              </a:spcBef>
+              <a:spcAft>
+                <a:spcPts val="600"/>
+              </a:spcAft>
+              <a:defRPr sz="1600">
+                <a:solidFill>
+                  <a:srgbClr val="323232"/>
+                </a:solidFill>
+              </a:defRPr>
+            </a:pPr>
+            <a:r>
+              <a:t>GET/POST /voice/webhook: Receive incoming calls (return NCCO)</a:t>
+            </a:r>
+          </a:p>
+          <a:p>
+            <a:pPr lvl="1">
+              <a:spcBef>
+                <a:spcPts val="600"/>
+              </a:spcBef>
+              <a:spcAft>
+                <a:spcPts val="600"/>
+              </a:spcAft>
+              <a:defRPr sz="1600">
+                <a:solidFill>
+                  <a:srgbClr val="323232"/>
+                </a:solidFill>
+              </a:defRPr>
+            </a:pPr>
+            <a:r>
+              <a:t>POST /demo/connect: Create video session</a:t>
+            </a:r>
+          </a:p>
+          <a:p>
+            <a:pPr lvl="1">
+              <a:spcBef>
+                <a:spcPts val="600"/>
+              </a:spcBef>
+              <a:spcAft>
+                <a:spcPts val="600"/>
+              </a:spcAft>
+              <a:defRPr sz="1600">
+                <a:solidFill>
+                  <a:srgbClr val="323232"/>
+                </a:solidFill>
+              </a:defRPr>
+            </a:pPr>
+            <a:r>
+              <a:t>POST /connect: General connection (Video API)</a:t>
+            </a:r>
+          </a:p>
+          <a:p>
+            <a:pPr lvl="1">
+              <a:spcBef>
+                <a:spcPts val="600"/>
+              </a:spcBef>
+              <a:spcAft>
+                <a:spcPts val="600"/>
+              </a:spcAft>
+              <a:defRPr sz="1600">
+                <a:solidFill>
+                  <a:srgbClr val="323232"/>
+                </a:solidFill>
+              </a:defRPr>
+            </a:pPr>
+            <a:r>
+              <a:t>GET /: Serve static HTML</a:t>
+            </a:r>
+          </a:p>
+          <a:p>
+            <a:pPr lvl="1">
+              <a:spcBef>
+                <a:spcPts val="600"/>
+              </a:spcBef>
+              <a:spcAft>
+                <a:spcPts val="600"/>
+              </a:spcAft>
+              <a:defRPr sz="1600">
+                <a:solidFill>
+                  <a:srgbClr val="323232"/>
+                </a:solidFill>
+              </a:defRPr>
+            </a:pPr>
+            <a:r>
+              <a:t>WebSocket /ws: Bidirectional audio streaming</a:t>
+            </a:r>
+          </a:p>
+          <a:p>
+            <a:pPr>
+              <a:spcBef>
+                <a:spcPts val="600"/>
+              </a:spcBef>
+              <a:spcAft>
+                <a:spcPts val="600"/>
+              </a:spcAft>
+              <a:defRPr sz="1800">
+                <a:solidFill>
+                  <a:srgbClr val="323232"/>
+                </a:solidFill>
+              </a:defRPr>
+            </a:pPr>
+          </a:p>
+          <a:p>
+            <a:pPr>
+              <a:spcBef>
+                <a:spcPts val="600"/>
+              </a:spcBef>
+              <a:spcAft>
+                <a:spcPts val="600"/>
+              </a:spcAft>
+              <a:defRPr sz="1800">
+                <a:solidFill>
+                  <a:srgbClr val="323232"/>
+                </a:solidFill>
+              </a:defRPr>
+            </a:pPr>
+            <a:r>
+              <a:t>Session Management: _active_connectors dict tracks multiple connections</a:t>
             </a:r>
           </a:p>
         </p:txBody>
@@ -7357,7 +7722,7 @@
               </a:defRPr>
             </a:pPr>
             <a:r>
-              <a:t>Pipecat Pipeline Flow</a:t>
+              <a:t>bot.py: Pipecat Pipeline</a:t>
             </a:r>
           </a:p>
         </p:txBody>
@@ -7398,133 +7763,163 @@
               </a:defRPr>
             </a:pPr>
             <a:r>
-              <a:t>1. Transport Input → AudioFrameLogger (debugging)</a:t>
-            </a:r>
-          </a:p>
-          <a:p>
-            <a:pPr>
-              <a:spcBef>
-                <a:spcPts val="600"/>
-              </a:spcBef>
-              <a:spcAft>
-                <a:spcPts val="600"/>
-              </a:spcAft>
-              <a:defRPr sz="1800">
-                <a:solidFill>
-                  <a:srgbClr val="323232"/>
-                </a:solidFill>
-              </a:defRPr>
-            </a:pPr>
-            <a:r>
-              <a:t>2. VADProcessor (SileroVAD) → Detect speech/silence</a:t>
-            </a:r>
-          </a:p>
-          <a:p>
-            <a:pPr>
-              <a:spcBef>
-                <a:spcPts val="600"/>
-              </a:spcBef>
-              <a:spcAft>
-                <a:spcPts val="600"/>
-              </a:spcAft>
-              <a:defRPr sz="1800">
-                <a:solidFill>
-                  <a:srgbClr val="323232"/>
-                </a:solidFill>
-              </a:defRPr>
-            </a:pPr>
-            <a:r>
-              <a:t>3. WhisperSTTServiceMLX → Audio → Text</a:t>
-            </a:r>
-          </a:p>
-          <a:p>
-            <a:pPr>
-              <a:spcBef>
-                <a:spcPts val="600"/>
-              </a:spcBef>
-              <a:spcAft>
-                <a:spcPts val="600"/>
-              </a:spcAft>
-              <a:defRPr sz="1800">
-                <a:solidFill>
-                  <a:srgbClr val="323232"/>
-                </a:solidFill>
-              </a:defRPr>
-            </a:pPr>
-            <a:r>
-              <a:t>4. LLMUserAggregator → Add utterance to LLMContext</a:t>
-            </a:r>
-          </a:p>
-          <a:p>
-            <a:pPr>
-              <a:spcBef>
-                <a:spcPts val="600"/>
-              </a:spcBef>
-              <a:spcAft>
-                <a:spcPts val="600"/>
-              </a:spcAft>
-              <a:defRPr sz="1800">
-                <a:solidFill>
-                  <a:srgbClr val="323232"/>
-                </a:solidFill>
-              </a:defRPr>
-            </a:pPr>
-            <a:r>
-              <a:t>5. OpenAILLMService (LM Studio) → Text → Text</a:t>
-            </a:r>
-          </a:p>
-          <a:p>
-            <a:pPr>
-              <a:spcBef>
-                <a:spcPts val="600"/>
-              </a:spcBef>
-              <a:spcAft>
-                <a:spcPts val="600"/>
-              </a:spcAft>
-              <a:defRPr sz="1800">
-                <a:solidFill>
-                  <a:srgbClr val="323232"/>
-                </a:solidFill>
-              </a:defRPr>
-            </a:pPr>
-            <a:r>
-              <a:t>6. LLMAssistantAggregator → Send response to LLMContext + TTS</a:t>
-            </a:r>
-          </a:p>
-          <a:p>
-            <a:pPr>
-              <a:spcBef>
-                <a:spcPts val="600"/>
-              </a:spcBef>
-              <a:spcAft>
-                <a:spcPts val="600"/>
-              </a:spcAft>
-              <a:defRPr sz="1800">
-                <a:solidFill>
-                  <a:srgbClr val="323232"/>
-                </a:solidFill>
-              </a:defRPr>
-            </a:pPr>
-            <a:r>
-              <a:t>7. PiperPlusTTSService → Text → Audio frames</a:t>
-            </a:r>
-          </a:p>
-          <a:p>
-            <a:pPr>
-              <a:spcBef>
-                <a:spcPts val="600"/>
-              </a:spcBef>
-              <a:spcAft>
-                <a:spcPts val="600"/>
-              </a:spcAft>
-              <a:defRPr sz="1800">
-                <a:solidFill>
-                  <a:srgbClr val="323232"/>
-                </a:solidFill>
-              </a:defRPr>
-            </a:pPr>
-            <a:r>
-              <a:t>8. Transport Output → Send to client</a:t>
+              <a:t>Responsibility: Audio processing, STT/LLM/TTS integration, conversation management</a:t>
+            </a:r>
+          </a:p>
+          <a:p>
+            <a:pPr>
+              <a:spcBef>
+                <a:spcPts val="600"/>
+              </a:spcBef>
+              <a:spcAft>
+                <a:spcPts val="600"/>
+              </a:spcAft>
+              <a:defRPr sz="1800">
+                <a:solidFill>
+                  <a:srgbClr val="323232"/>
+                </a:solidFill>
+              </a:defRPr>
+            </a:pPr>
+          </a:p>
+          <a:p>
+            <a:pPr>
+              <a:spcBef>
+                <a:spcPts val="600"/>
+              </a:spcBef>
+              <a:spcAft>
+                <a:spcPts val="600"/>
+              </a:spcAft>
+              <a:defRPr sz="1800">
+                <a:solidFill>
+                  <a:srgbClr val="323232"/>
+                </a:solidFill>
+              </a:defRPr>
+            </a:pPr>
+            <a:r>
+              <a:t>Initialization (preload_models):</a:t>
+            </a:r>
+          </a:p>
+          <a:p>
+            <a:pPr lvl="1">
+              <a:spcBef>
+                <a:spcPts val="600"/>
+              </a:spcBef>
+              <a:spcAft>
+                <a:spcPts val="600"/>
+              </a:spcAft>
+              <a:defRPr sz="1600">
+                <a:solidFill>
+                  <a:srgbClr val="323232"/>
+                </a:solidFill>
+              </a:defRPr>
+            </a:pPr>
+            <a:r>
+              <a:t>OpenAILLMService (LM Studio)</a:t>
+            </a:r>
+          </a:p>
+          <a:p>
+            <a:pPr lvl="1">
+              <a:spcBef>
+                <a:spcPts val="600"/>
+              </a:spcBef>
+              <a:spcAft>
+                <a:spcPts val="600"/>
+              </a:spcAft>
+              <a:defRPr sz="1600">
+                <a:solidFill>
+                  <a:srgbClr val="323232"/>
+                </a:solidFill>
+              </a:defRPr>
+            </a:pPr>
+            <a:r>
+              <a:t>WhisperSTTServiceMLX (Whisper)</a:t>
+            </a:r>
+          </a:p>
+          <a:p>
+            <a:pPr lvl="1">
+              <a:spcBef>
+                <a:spcPts val="600"/>
+              </a:spcBef>
+              <a:spcAft>
+                <a:spcPts val="600"/>
+              </a:spcAft>
+              <a:defRPr sz="1600">
+                <a:solidFill>
+                  <a:srgbClr val="323232"/>
+                </a:solidFill>
+              </a:defRPr>
+            </a:pPr>
+            <a:r>
+              <a:t>PiperPlusTTSService (Japanese TTS)</a:t>
+            </a:r>
+          </a:p>
+          <a:p>
+            <a:pPr lvl="1">
+              <a:spcBef>
+                <a:spcPts val="600"/>
+              </a:spcBef>
+              <a:spcAft>
+                <a:spcPts val="600"/>
+              </a:spcAft>
+              <a:defRPr sz="1600">
+                <a:solidFill>
+                  <a:srgbClr val="323232"/>
+                </a:solidFill>
+              </a:defRPr>
+            </a:pPr>
+            <a:r>
+              <a:t>SileroVADAnalyzer (Voice activity detection)</a:t>
+            </a:r>
+          </a:p>
+          <a:p>
+            <a:pPr lvl="1">
+              <a:spcBef>
+                <a:spcPts val="600"/>
+              </a:spcBef>
+              <a:spcAft>
+                <a:spcPts val="600"/>
+              </a:spcAft>
+              <a:defRPr sz="1600">
+                <a:solidFill>
+                  <a:srgbClr val="323232"/>
+                </a:solidFill>
+              </a:defRPr>
+            </a:pPr>
+            <a:r>
+              <a:t>LocalSmartTurnAnalyzerV3 (Conversation turn detection)</a:t>
+            </a:r>
+          </a:p>
+          <a:p>
+            <a:pPr>
+              <a:spcBef>
+                <a:spcPts val="600"/>
+              </a:spcBef>
+              <a:spcAft>
+                <a:spcPts val="600"/>
+              </a:spcAft>
+              <a:defRPr sz="1800">
+                <a:solidFill>
+                  <a:srgbClr val="323232"/>
+                </a:solidFill>
+              </a:defRPr>
+            </a:pPr>
+          </a:p>
+          <a:p>
+            <a:pPr>
+              <a:spcBef>
+                <a:spcPts val="600"/>
+              </a:spcBef>
+              <a:spcAft>
+                <a:spcPts val="600"/>
+              </a:spcAft>
+              <a:defRPr sz="1800">
+                <a:solidFill>
+                  <a:srgbClr val="323232"/>
+                </a:solidFill>
+              </a:defRPr>
+            </a:pPr>
+            <a:r>
+              <a:t>Critical Fix: Monkey-Patch LLMAssistantAggregator to forward TextFrame downstream</a:t>
             </a:r>
           </a:p>
         </p:txBody>
@@ -7585,7 +7980,7 @@
               </a:defRPr>
             </a:pPr>
             <a:r>
-              <a:t>tts_piper_plus.py: Japanese TTS</a:t>
+              <a:t>Pipecat Pipeline Flow</a:t>
             </a:r>
           </a:p>
         </p:txBody>
@@ -7626,145 +8021,133 @@
               </a:defRPr>
             </a:pPr>
             <a:r>
-              <a:t>Purpose: Wrap pyopenjtalk (Japanese HTS synthesis) in Pipecat interface</a:t>
-            </a:r>
-          </a:p>
-          <a:p>
-            <a:pPr>
-              <a:spcBef>
-                <a:spcPts val="600"/>
-              </a:spcBef>
-              <a:spcAft>
-                <a:spcPts val="600"/>
-              </a:spcAft>
-              <a:defRPr sz="1800">
-                <a:solidFill>
-                  <a:srgbClr val="323232"/>
-                </a:solidFill>
-              </a:defRPr>
-            </a:pPr>
-          </a:p>
-          <a:p>
-            <a:pPr>
-              <a:spcBef>
-                <a:spcPts val="600"/>
-              </a:spcBef>
-              <a:spcAft>
-                <a:spcPts val="600"/>
-              </a:spcAft>
-              <a:defRPr sz="1800">
-                <a:solidFill>
-                  <a:srgbClr val="323232"/>
-                </a:solidFill>
-              </a:defRPr>
-            </a:pPr>
-            <a:r>
-              <a:t>Features:</a:t>
-            </a:r>
-          </a:p>
-          <a:p>
-            <a:pPr lvl="1">
-              <a:spcBef>
-                <a:spcPts val="600"/>
-              </a:spcBef>
-              <a:spcAft>
-                <a:spcPts val="600"/>
-              </a:spcAft>
-              <a:defRPr sz="1600">
-                <a:solidFill>
-                  <a:srgbClr val="323232"/>
-                </a:solidFill>
-              </a:defRPr>
-            </a:pPr>
-            <a:r>
-              <a:t>Async execution: Use thread pool to avoid blocking TTS</a:t>
-            </a:r>
-          </a:p>
-          <a:p>
-            <a:pPr lvl="1">
-              <a:spcBef>
-                <a:spcPts val="600"/>
-              </a:spcBef>
-              <a:spcAft>
-                <a:spcPts val="600"/>
-              </a:spcAft>
-              <a:defRPr sz="1600">
-                <a:solidFill>
-                  <a:srgbClr val="323232"/>
-                </a:solidFill>
-              </a:defRPr>
-            </a:pPr>
-            <a:r>
-              <a:t>Audio normalization: Convert float64 → int16 with clipping</a:t>
-            </a:r>
-          </a:p>
-          <a:p>
-            <a:pPr lvl="1">
-              <a:spcBef>
-                <a:spcPts val="600"/>
-              </a:spcBef>
-              <a:spcAft>
-                <a:spcPts val="600"/>
-              </a:spcAft>
-              <a:defRPr sz="1600">
-                <a:solidFill>
-                  <a:srgbClr val="323232"/>
-                </a:solidFill>
-              </a:defRPr>
-            </a:pPr>
-            <a:r>
-              <a:t>Chunking: Generate TTSAudioRawFrame in 4096B units</a:t>
-            </a:r>
-          </a:p>
-          <a:p>
-            <a:pPr lvl="1">
-              <a:spcBef>
-                <a:spcPts val="600"/>
-              </a:spcBef>
-              <a:spcAft>
-                <a:spcPts val="600"/>
-              </a:spcAft>
-              <a:defRPr sz="1600">
-                <a:solidFill>
-                  <a:srgbClr val="323232"/>
-                </a:solidFill>
-              </a:defRPr>
-            </a:pPr>
-            <a:r>
-              <a:t>Parameters: Speed=1.0, Pitch=0.0 (adjustable)</a:t>
-            </a:r>
-          </a:p>
-          <a:p>
-            <a:pPr>
-              <a:spcBef>
-                <a:spcPts val="600"/>
-              </a:spcBef>
-              <a:spcAft>
-                <a:spcPts val="600"/>
-              </a:spcAft>
-              <a:defRPr sz="1800">
-                <a:solidFill>
-                  <a:srgbClr val="323232"/>
-                </a:solidFill>
-              </a:defRPr>
-            </a:pPr>
-          </a:p>
-          <a:p>
-            <a:pPr>
-              <a:spcBef>
-                <a:spcPts val="600"/>
-              </a:spcBef>
-              <a:spcAft>
-                <a:spcPts val="600"/>
-              </a:spcAft>
-              <a:defRPr sz="1800">
-                <a:solidFill>
-                  <a:srgbClr val="323232"/>
-                </a:solidFill>
-              </a:defRPr>
-            </a:pPr>
-            <a:r>
-              <a:t>Advantages: No model download needed, lightweight, fast</a:t>
+              <a:t>1. Transport Input → AudioFrameLogger (debugging)</a:t>
+            </a:r>
+          </a:p>
+          <a:p>
+            <a:pPr>
+              <a:spcBef>
+                <a:spcPts val="600"/>
+              </a:spcBef>
+              <a:spcAft>
+                <a:spcPts val="600"/>
+              </a:spcAft>
+              <a:defRPr sz="1800">
+                <a:solidFill>
+                  <a:srgbClr val="323232"/>
+                </a:solidFill>
+              </a:defRPr>
+            </a:pPr>
+            <a:r>
+              <a:t>2. VADProcessor (SileroVAD) → Detect speech/silence</a:t>
+            </a:r>
+          </a:p>
+          <a:p>
+            <a:pPr>
+              <a:spcBef>
+                <a:spcPts val="600"/>
+              </a:spcBef>
+              <a:spcAft>
+                <a:spcPts val="600"/>
+              </a:spcAft>
+              <a:defRPr sz="1800">
+                <a:solidFill>
+                  <a:srgbClr val="323232"/>
+                </a:solidFill>
+              </a:defRPr>
+            </a:pPr>
+            <a:r>
+              <a:t>3. WhisperSTTServiceMLX → Audio → Text</a:t>
+            </a:r>
+          </a:p>
+          <a:p>
+            <a:pPr>
+              <a:spcBef>
+                <a:spcPts val="600"/>
+              </a:spcBef>
+              <a:spcAft>
+                <a:spcPts val="600"/>
+              </a:spcAft>
+              <a:defRPr sz="1800">
+                <a:solidFill>
+                  <a:srgbClr val="323232"/>
+                </a:solidFill>
+              </a:defRPr>
+            </a:pPr>
+            <a:r>
+              <a:t>4. LLMUserAggregator → Add utterance to LLMContext</a:t>
+            </a:r>
+          </a:p>
+          <a:p>
+            <a:pPr>
+              <a:spcBef>
+                <a:spcPts val="600"/>
+              </a:spcBef>
+              <a:spcAft>
+                <a:spcPts val="600"/>
+              </a:spcAft>
+              <a:defRPr sz="1800">
+                <a:solidFill>
+                  <a:srgbClr val="323232"/>
+                </a:solidFill>
+              </a:defRPr>
+            </a:pPr>
+            <a:r>
+              <a:t>5. OpenAILLMService (LM Studio) → Text → Text</a:t>
+            </a:r>
+          </a:p>
+          <a:p>
+            <a:pPr>
+              <a:spcBef>
+                <a:spcPts val="600"/>
+              </a:spcBef>
+              <a:spcAft>
+                <a:spcPts val="600"/>
+              </a:spcAft>
+              <a:defRPr sz="1800">
+                <a:solidFill>
+                  <a:srgbClr val="323232"/>
+                </a:solidFill>
+              </a:defRPr>
+            </a:pPr>
+            <a:r>
+              <a:t>6. LLMAssistantAggregator → Send response to LLMContext + TTS</a:t>
+            </a:r>
+          </a:p>
+          <a:p>
+            <a:pPr>
+              <a:spcBef>
+                <a:spcPts val="600"/>
+              </a:spcBef>
+              <a:spcAft>
+                <a:spcPts val="600"/>
+              </a:spcAft>
+              <a:defRPr sz="1800">
+                <a:solidFill>
+                  <a:srgbClr val="323232"/>
+                </a:solidFill>
+              </a:defRPr>
+            </a:pPr>
+            <a:r>
+              <a:t>7. PiperPlusTTSService → Text → Audio frames</a:t>
+            </a:r>
+          </a:p>
+          <a:p>
+            <a:pPr>
+              <a:spcBef>
+                <a:spcPts val="600"/>
+              </a:spcBef>
+              <a:spcAft>
+                <a:spcPts val="600"/>
+              </a:spcAft>
+              <a:defRPr sz="1800">
+                <a:solidFill>
+                  <a:srgbClr val="323232"/>
+                </a:solidFill>
+              </a:defRPr>
+            </a:pPr>
+            <a:r>
+              <a:t>8. Transport Output → Send to client</a:t>
             </a:r>
           </a:p>
         </p:txBody>
@@ -7783,7 +8166,7 @@
     <p:bg>
       <p:bgPr>
         <a:solidFill>
-          <a:srgbClr val="F5F5F5"/>
+          <a:srgbClr val="FFFFFF"/>
         </a:solidFill>
         <a:effectLst/>
       </p:bgPr>
@@ -7803,8 +8186,8 @@
         </p:nvSpPr>
         <p:spPr>
           <a:xfrm>
-            <a:off x="457200" y="365760"/>
-            <a:ext cx="8229600" cy="731520"/>
+            <a:off x="365760" y="228600"/>
+            <a:ext cx="8412480" cy="640080"/>
           </a:xfrm>
           <a:prstGeom prst="rect">
             <a:avLst/>
@@ -7812,203 +8195,48 @@
           <a:noFill/>
         </p:spPr>
         <p:txBody>
-          <a:bodyPr wrap="none">
+          <a:bodyPr wrap="square">
             <a:spAutoFit/>
           </a:bodyPr>
           <a:lstStyle/>
           <a:p>
-            <a:pPr>
-              <a:defRPr sz="4000" b="1">
+            <a:pPr algn="ctr">
+              <a:defRPr sz="2800" b="1">
                 <a:solidFill>
                   <a:srgbClr val="1976D2"/>
                 </a:solidFill>
               </a:defRPr>
             </a:pPr>
             <a:r>
-              <a:t>static/index.html: Browser UI</a:t>
-            </a:r>
-          </a:p>
-        </p:txBody>
-      </p:sp>
-      <p:sp>
-        <p:nvSpPr>
-          <p:cNvPr id="3" name="TextBox 2"/>
-          <p:cNvSpPr txBox="1"/>
+              <a:t>Diagram: Pipecat Pipeline Detail</a:t>
+            </a:r>
+          </a:p>
+        </p:txBody>
+      </p:sp>
+      <p:pic>
+        <p:nvPicPr>
+          <p:cNvPr id="3" name="Picture 2" descr="pipeline_en.png"/>
+          <p:cNvPicPr>
+            <a:picLocks noChangeAspect="1"/>
+          </p:cNvPicPr>
           <p:nvPr/>
-        </p:nvSpPr>
+        </p:nvPicPr>
+        <p:blipFill>
+          <a:blip r:embed="rId2"/>
+          <a:stretch>
+            <a:fillRect/>
+          </a:stretch>
+        </p:blipFill>
         <p:spPr>
           <a:xfrm>
-            <a:off x="640080" y="1280160"/>
-            <a:ext cx="7863840" cy="5029200"/>
+            <a:off x="3150358" y="1051560"/>
+            <a:ext cx="2843283" cy="5486400"/>
           </a:xfrm>
           <a:prstGeom prst="rect">
             <a:avLst/>
           </a:prstGeom>
-          <a:noFill/>
         </p:spPr>
-        <p:txBody>
-          <a:bodyPr wrap="square">
-            <a:spAutoFit/>
-          </a:bodyPr>
-          <a:lstStyle/>
-          <a:p>
-            <a:pPr>
-              <a:spcBef>
-                <a:spcPts val="600"/>
-              </a:spcBef>
-              <a:spcAft>
-                <a:spcPts val="600"/>
-              </a:spcAft>
-              <a:defRPr sz="1800">
-                <a:solidFill>
-                  <a:srgbClr val="323232"/>
-                </a:solidFill>
-              </a:defRPr>
-            </a:pPr>
-            <a:r>
-              <a:t>Technology: Vonage OpenTok SDK (vanilla JavaScript)</a:t>
-            </a:r>
-          </a:p>
-          <a:p>
-            <a:pPr>
-              <a:spcBef>
-                <a:spcPts val="600"/>
-              </a:spcBef>
-              <a:spcAft>
-                <a:spcPts val="600"/>
-              </a:spcAft>
-              <a:defRPr sz="1800">
-                <a:solidFill>
-                  <a:srgbClr val="323232"/>
-                </a:solidFill>
-              </a:defRPr>
-            </a:pPr>
-          </a:p>
-          <a:p>
-            <a:pPr>
-              <a:spcBef>
-                <a:spcPts val="600"/>
-              </a:spcBef>
-              <a:spcAft>
-                <a:spcPts val="600"/>
-              </a:spcAft>
-              <a:defRPr sz="1800">
-                <a:solidFill>
-                  <a:srgbClr val="323232"/>
-                </a:solidFill>
-              </a:defRPr>
-            </a:pPr>
-            <a:r>
-              <a:t>Features:</a:t>
-            </a:r>
-          </a:p>
-          <a:p>
-            <a:pPr lvl="1">
-              <a:spcBef>
-                <a:spcPts val="600"/>
-              </a:spcBef>
-              <a:spcAft>
-                <a:spcPts val="600"/>
-              </a:spcAft>
-              <a:defRPr sz="1600">
-                <a:solidFill>
-                  <a:srgbClr val="323232"/>
-                </a:solidFill>
-              </a:defRPr>
-            </a:pPr>
-            <a:r>
-              <a:t>Connect Button: POST /demo/connect → Create Vonage session</a:t>
-            </a:r>
-          </a:p>
-          <a:p>
-            <a:pPr lvl="1">
-              <a:spcBef>
-                <a:spcPts val="600"/>
-              </a:spcBef>
-              <a:spcAft>
-                <a:spcPts val="600"/>
-              </a:spcAft>
-              <a:defRPr sz="1600">
-                <a:solidFill>
-                  <a:srgbClr val="323232"/>
-                </a:solidFill>
-              </a:defRPr>
-            </a:pPr>
-            <a:r>
-              <a:t>Status Display: Update connection state in real-time</a:t>
-            </a:r>
-          </a:p>
-          <a:p>
-            <a:pPr lvl="1">
-              <a:spcBef>
-                <a:spcPts val="600"/>
-              </a:spcBef>
-              <a:spcAft>
-                <a:spcPts val="600"/>
-              </a:spcAft>
-              <a:defRPr sz="1600">
-                <a:solidFill>
-                  <a:srgbClr val="323232"/>
-                </a:solidFill>
-              </a:defRPr>
-            </a:pPr>
-            <a:r>
-              <a:t>Log Panel: Record events/errors with timestamp</a:t>
-            </a:r>
-          </a:p>
-          <a:p>
-            <a:pPr lvl="1">
-              <a:spcBef>
-                <a:spcPts val="600"/>
-              </a:spcBef>
-              <a:spcAft>
-                <a:spcPts val="600"/>
-              </a:spcAft>
-              <a:defRPr sz="1600">
-                <a:solidFill>
-                  <a:srgbClr val="323232"/>
-                </a:solidFill>
-              </a:defRPr>
-            </a:pPr>
-            <a:r>
-              <a:t>Audio Stream: Subscribe to bot's microphone (audioOnly=true)</a:t>
-            </a:r>
-          </a:p>
-          <a:p>
-            <a:pPr>
-              <a:spcBef>
-                <a:spcPts val="600"/>
-              </a:spcBef>
-              <a:spcAft>
-                <a:spcPts val="600"/>
-              </a:spcAft>
-              <a:defRPr sz="1800">
-                <a:solidFill>
-                  <a:srgbClr val="323232"/>
-                </a:solidFill>
-              </a:defRPr>
-            </a:pPr>
-          </a:p>
-          <a:p>
-            <a:pPr>
-              <a:spcBef>
-                <a:spcPts val="600"/>
-              </a:spcBef>
-              <a:spcAft>
-                <a:spcPts val="600"/>
-              </a:spcAft>
-              <a:defRPr sz="1800">
-                <a:solidFill>
-                  <a:srgbClr val="323232"/>
-                </a:solidFill>
-              </a:defRPr>
-            </a:pPr>
-            <a:r>
-              <a:t>Session Flow: OT.initSession() → Connect with token → Subscribe()</a:t>
-            </a:r>
-          </a:p>
-        </p:txBody>
-      </p:sp>
+      </p:pic>
     </p:spTree>
   </p:cSld>
   <p:clrMapOvr>
@@ -8065,7 +8293,7 @@
               </a:defRPr>
             </a:pPr>
             <a:r>
-              <a:t>Data Flow: Video Session</a:t>
+              <a:t>tts_piper_plus.py: Japanese TTS</a:t>
             </a:r>
           </a:p>
         </p:txBody>
@@ -8106,115 +8334,145 @@
               </a:defRPr>
             </a:pPr>
             <a:r>
-              <a:t>1. User clicks 'Connect' button</a:t>
-            </a:r>
-          </a:p>
-          <a:p>
-            <a:pPr>
-              <a:spcBef>
-                <a:spcPts val="600"/>
-              </a:spcBef>
-              <a:spcAft>
-                <a:spcPts val="600"/>
-              </a:spcAft>
-              <a:defRPr sz="1800">
-                <a:solidFill>
-                  <a:srgbClr val="323232"/>
-                </a:solidFill>
-              </a:defRPr>
-            </a:pPr>
-            <a:r>
-              <a:t>2. Browser calls POST /demo/connect</a:t>
-            </a:r>
-          </a:p>
-          <a:p>
-            <a:pPr>
-              <a:spcBef>
-                <a:spcPts val="600"/>
-              </a:spcBef>
-              <a:spcAft>
-                <a:spcPts val="600"/>
-              </a:spcAft>
-              <a:defRPr sz="1800">
-                <a:solidFill>
-                  <a:srgbClr val="323232"/>
-                </a:solidFill>
-              </a:defRPr>
-            </a:pPr>
-            <a:r>
-              <a:t>3. Server creates Vonage Session → Launches Audio Connector</a:t>
-            </a:r>
-          </a:p>
-          <a:p>
-            <a:pPr>
-              <a:spcBef>
-                <a:spcPts val="600"/>
-              </a:spcBef>
-              <a:spcAft>
-                <a:spcPts val="600"/>
-              </a:spcAft>
-              <a:defRPr sz="1800">
-                <a:solidFill>
-                  <a:srgbClr val="323232"/>
-                </a:solidFill>
-              </a:defRPr>
-            </a:pPr>
-            <a:r>
-              <a:t>4. Browser calls OT.initSession() → Join with token</a:t>
-            </a:r>
-          </a:p>
-          <a:p>
-            <a:pPr>
-              <a:spcBef>
-                <a:spcPts val="600"/>
-              </a:spcBef>
-              <a:spcAft>
-                <a:spcPts val="600"/>
-              </a:spcAft>
-              <a:defRPr sz="1800">
-                <a:solidFill>
-                  <a:srgbClr val="323232"/>
-                </a:solidFill>
-              </a:defRPr>
-            </a:pPr>
-            <a:r>
-              <a:t>5. Vonage Audio Connector connects to WebSocket</a:t>
-            </a:r>
-          </a:p>
-          <a:p>
-            <a:pPr>
-              <a:spcBef>
-                <a:spcPts val="600"/>
-              </a:spcBef>
-              <a:spcAft>
-                <a:spcPts val="600"/>
-              </a:spcAft>
-              <a:defRPr sz="1800">
-                <a:solidFill>
-                  <a:srgbClr val="323232"/>
-                </a:solidFill>
-              </a:defRPr>
-            </a:pPr>
-            <a:r>
-              <a:t>6. Bot sends greeting (Text → TTS → Audio)</a:t>
-            </a:r>
-          </a:p>
-          <a:p>
-            <a:pPr>
-              <a:spcBef>
-                <a:spcPts val="600"/>
-              </a:spcBef>
-              <a:spcAft>
-                <a:spcPts val="600"/>
-              </a:spcAft>
-              <a:defRPr sz="1800">
-                <a:solidFill>
-                  <a:srgbClr val="323232"/>
-                </a:solidFill>
-              </a:defRPr>
-            </a:pPr>
-            <a:r>
-              <a:t>7. Bidirectional: User speech ↔ Vonage ↔ Pipecat ↔ Response audio</a:t>
+              <a:t>Purpose: Wrap pyopenjtalk (Japanese HTS synthesis) in Pipecat interface</a:t>
+            </a:r>
+          </a:p>
+          <a:p>
+            <a:pPr>
+              <a:spcBef>
+                <a:spcPts val="600"/>
+              </a:spcBef>
+              <a:spcAft>
+                <a:spcPts val="600"/>
+              </a:spcAft>
+              <a:defRPr sz="1800">
+                <a:solidFill>
+                  <a:srgbClr val="323232"/>
+                </a:solidFill>
+              </a:defRPr>
+            </a:pPr>
+          </a:p>
+          <a:p>
+            <a:pPr>
+              <a:spcBef>
+                <a:spcPts val="600"/>
+              </a:spcBef>
+              <a:spcAft>
+                <a:spcPts val="600"/>
+              </a:spcAft>
+              <a:defRPr sz="1800">
+                <a:solidFill>
+                  <a:srgbClr val="323232"/>
+                </a:solidFill>
+              </a:defRPr>
+            </a:pPr>
+            <a:r>
+              <a:t>Features:</a:t>
+            </a:r>
+          </a:p>
+          <a:p>
+            <a:pPr lvl="1">
+              <a:spcBef>
+                <a:spcPts val="600"/>
+              </a:spcBef>
+              <a:spcAft>
+                <a:spcPts val="600"/>
+              </a:spcAft>
+              <a:defRPr sz="1600">
+                <a:solidFill>
+                  <a:srgbClr val="323232"/>
+                </a:solidFill>
+              </a:defRPr>
+            </a:pPr>
+            <a:r>
+              <a:t>Async execution: Use thread pool to avoid blocking TTS</a:t>
+            </a:r>
+          </a:p>
+          <a:p>
+            <a:pPr lvl="1">
+              <a:spcBef>
+                <a:spcPts val="600"/>
+              </a:spcBef>
+              <a:spcAft>
+                <a:spcPts val="600"/>
+              </a:spcAft>
+              <a:defRPr sz="1600">
+                <a:solidFill>
+                  <a:srgbClr val="323232"/>
+                </a:solidFill>
+              </a:defRPr>
+            </a:pPr>
+            <a:r>
+              <a:t>Audio normalization: Convert float64 → int16 with clipping</a:t>
+            </a:r>
+          </a:p>
+          <a:p>
+            <a:pPr lvl="1">
+              <a:spcBef>
+                <a:spcPts val="600"/>
+              </a:spcBef>
+              <a:spcAft>
+                <a:spcPts val="600"/>
+              </a:spcAft>
+              <a:defRPr sz="1600">
+                <a:solidFill>
+                  <a:srgbClr val="323232"/>
+                </a:solidFill>
+              </a:defRPr>
+            </a:pPr>
+            <a:r>
+              <a:t>Chunking: Generate TTSAudioRawFrame in 4096B units</a:t>
+            </a:r>
+          </a:p>
+          <a:p>
+            <a:pPr lvl="1">
+              <a:spcBef>
+                <a:spcPts val="600"/>
+              </a:spcBef>
+              <a:spcAft>
+                <a:spcPts val="600"/>
+              </a:spcAft>
+              <a:defRPr sz="1600">
+                <a:solidFill>
+                  <a:srgbClr val="323232"/>
+                </a:solidFill>
+              </a:defRPr>
+            </a:pPr>
+            <a:r>
+              <a:t>Parameters: Speed=1.0, Pitch=0.0 (adjustable)</a:t>
+            </a:r>
+          </a:p>
+          <a:p>
+            <a:pPr>
+              <a:spcBef>
+                <a:spcPts val="600"/>
+              </a:spcBef>
+              <a:spcAft>
+                <a:spcPts val="600"/>
+              </a:spcAft>
+              <a:defRPr sz="1800">
+                <a:solidFill>
+                  <a:srgbClr val="323232"/>
+                </a:solidFill>
+              </a:defRPr>
+            </a:pPr>
+          </a:p>
+          <a:p>
+            <a:pPr>
+              <a:spcBef>
+                <a:spcPts val="600"/>
+              </a:spcBef>
+              <a:spcAft>
+                <a:spcPts val="600"/>
+              </a:spcAft>
+              <a:defRPr sz="1800">
+                <a:solidFill>
+                  <a:srgbClr val="323232"/>
+                </a:solidFill>
+              </a:defRPr>
+            </a:pPr>
+            <a:r>
+              <a:t>Advantages: No model download needed, lightweight, fast</a:t>
             </a:r>
           </a:p>
         </p:txBody>
